--- a/docs/Folder_Grant_프로그램_소개서_Beta.pptx
+++ b/docs/Folder_Grant_프로그램_소개서_Beta.pptx
@@ -3139,7 +3139,9 @@
                 <a:solidFill>
                   <a:srgbClr val="8DB1FF"/>
                 </a:solidFill>
-                <a:latin typeface="Noto Sans CJK KR"/>
+                <a:latin typeface="맑은 고딕"/>
+                <a:ea typeface="맑은 고딕"/>
+                <a:cs typeface="맑은 고딕"/>
               </a:defRPr>
             </a:pPr>
             <a:r>
@@ -3178,7 +3180,9 @@
                 <a:solidFill>
                   <a:srgbClr val="FFFFFF"/>
                 </a:solidFill>
-                <a:latin typeface="Noto Sans CJK KR"/>
+                <a:latin typeface="맑은 고딕"/>
+                <a:ea typeface="맑은 고딕"/>
+                <a:cs typeface="맑은 고딕"/>
               </a:defRPr>
             </a:pPr>
             <a:r>
@@ -3217,7 +3221,9 @@
                 <a:solidFill>
                   <a:srgbClr val="B7C7DF"/>
                 </a:solidFill>
-                <a:latin typeface="Noto Sans CJK KR"/>
+                <a:latin typeface="맑은 고딕"/>
+                <a:ea typeface="맑은 고딕"/>
+                <a:cs typeface="맑은 고딕"/>
               </a:defRPr>
             </a:pPr>
             <a:r>
@@ -3256,7 +3262,9 @@
                 <a:solidFill>
                   <a:srgbClr val="91A6C4"/>
                 </a:solidFill>
-                <a:latin typeface="Noto Sans CJK KR"/>
+                <a:latin typeface="맑은 고딕"/>
+                <a:ea typeface="맑은 고딕"/>
+                <a:cs typeface="맑은 고딕"/>
               </a:defRPr>
             </a:pPr>
             <a:r>
@@ -3295,7 +3303,9 @@
                 <a:solidFill>
                   <a:srgbClr val="91A6C4"/>
                 </a:solidFill>
-                <a:latin typeface="Noto Sans CJK KR"/>
+                <a:latin typeface="맑은 고딕"/>
+                <a:ea typeface="맑은 고딕"/>
+                <a:cs typeface="맑은 고딕"/>
               </a:defRPr>
             </a:pPr>
             <a:r>
@@ -3334,7 +3344,9 @@
                 <a:solidFill>
                   <a:srgbClr val="FFFFFF"/>
                 </a:solidFill>
-                <a:latin typeface="Noto Sans CJK KR"/>
+                <a:latin typeface="맑은 고딕"/>
+                <a:ea typeface="맑은 고딕"/>
+                <a:cs typeface="맑은 고딕"/>
               </a:defRPr>
             </a:pPr>
             <a:r>
@@ -3350,7 +3362,9 @@
                 <a:solidFill>
                   <a:srgbClr val="FFFFFF"/>
                 </a:solidFill>
-                <a:latin typeface="Noto Sans CJK KR"/>
+                <a:latin typeface="맑은 고딕"/>
+                <a:ea typeface="맑은 고딕"/>
+                <a:cs typeface="맑은 고딕"/>
               </a:defRPr>
             </a:pPr>
             <a:r>
@@ -3389,7 +3403,9 @@
                 <a:solidFill>
                   <a:srgbClr val="B7C7DF"/>
                 </a:solidFill>
-                <a:latin typeface="Noto Sans CJK KR"/>
+                <a:latin typeface="맑은 고딕"/>
+                <a:ea typeface="맑은 고딕"/>
+                <a:cs typeface="맑은 고딕"/>
               </a:defRPr>
             </a:pPr>
             <a:r>
@@ -3405,11 +3421,13 @@
                 <a:solidFill>
                   <a:srgbClr val="B7C7DF"/>
                 </a:solidFill>
-                <a:latin typeface="Noto Sans CJK KR"/>
-              </a:defRPr>
-            </a:pPr>
-            <a:r>
-              <a:t>제한된 시험 대상부터 검증하는 Beta 릴리스</a:t>
+                <a:latin typeface="맑은 고딕"/>
+                <a:ea typeface="맑은 고딕"/>
+                <a:cs typeface="맑은 고딕"/>
+              </a:defRPr>
+            </a:pPr>
+            <a:r>
+              <a:t>제한된 시험 대상에서 먼저 검증하는 Beta 릴리스</a:t>
             </a:r>
           </a:p>
         </p:txBody>
@@ -3489,7 +3507,9 @@
                 <a:solidFill>
                   <a:srgbClr val="FFFFFF"/>
                 </a:solidFill>
-                <a:latin typeface="Noto Sans CJK KR"/>
+                <a:latin typeface="맑은 고딕"/>
+                <a:ea typeface="맑은 고딕"/>
+                <a:cs typeface="맑은 고딕"/>
               </a:defRPr>
             </a:pPr>
             <a:r>
@@ -3528,7 +3548,9 @@
                 <a:solidFill>
                   <a:srgbClr val="FFFFFF"/>
                 </a:solidFill>
-                <a:latin typeface="Noto Sans CJK KR"/>
+                <a:latin typeface="맑은 고딕"/>
+                <a:ea typeface="맑은 고딕"/>
+                <a:cs typeface="맑은 고딕"/>
               </a:defRPr>
             </a:pPr>
             <a:r>
@@ -3544,7 +3566,9 @@
                 <a:solidFill>
                   <a:srgbClr val="FFFFFF"/>
                 </a:solidFill>
-                <a:latin typeface="Noto Sans CJK KR"/>
+                <a:latin typeface="맑은 고딕"/>
+                <a:ea typeface="맑은 고딕"/>
+                <a:cs typeface="맑은 고딕"/>
               </a:defRPr>
             </a:pPr>
             <a:r>
@@ -3609,7 +3633,9 @@
                 <a:solidFill>
                   <a:srgbClr val="2962FF"/>
                 </a:solidFill>
-                <a:latin typeface="Noto Sans CJK KR"/>
+                <a:latin typeface="맑은 고딕"/>
+                <a:ea typeface="맑은 고딕"/>
+                <a:cs typeface="맑은 고딕"/>
               </a:defRPr>
             </a:pPr>
             <a:r>
@@ -3648,7 +3674,9 @@
                 <a:solidFill>
                   <a:srgbClr val="14233D"/>
                 </a:solidFill>
-                <a:latin typeface="Noto Sans CJK KR"/>
+                <a:latin typeface="맑은 고딕"/>
+                <a:ea typeface="맑은 고딕"/>
+                <a:cs typeface="맑은 고딕"/>
               </a:defRPr>
             </a:pPr>
             <a:r>
@@ -3687,7 +3715,9 @@
                 <a:solidFill>
                   <a:srgbClr val="60718A"/>
                 </a:solidFill>
-                <a:latin typeface="Noto Sans CJK KR"/>
+                <a:latin typeface="맑은 고딕"/>
+                <a:ea typeface="맑은 고딕"/>
+                <a:cs typeface="맑은 고딕"/>
               </a:defRPr>
             </a:pPr>
             <a:r>
@@ -3726,7 +3756,9 @@
                 <a:solidFill>
                   <a:srgbClr val="60718A"/>
                 </a:solidFill>
-                <a:latin typeface="Noto Sans CJK KR"/>
+                <a:latin typeface="맑은 고딕"/>
+                <a:ea typeface="맑은 고딕"/>
+                <a:cs typeface="맑은 고딕"/>
               </a:defRPr>
             </a:pPr>
             <a:r>
@@ -3765,7 +3797,9 @@
                 <a:solidFill>
                   <a:srgbClr val="60718A"/>
                 </a:solidFill>
-                <a:latin typeface="Noto Sans CJK KR"/>
+                <a:latin typeface="맑은 고딕"/>
+                <a:ea typeface="맑은 고딕"/>
+                <a:cs typeface="맑은 고딕"/>
               </a:defRPr>
             </a:pPr>
             <a:r>
@@ -3849,7 +3883,9 @@
                 <a:solidFill>
                   <a:srgbClr val="2962FF"/>
                 </a:solidFill>
-                <a:latin typeface="Noto Sans CJK KR"/>
+                <a:latin typeface="맑은 고딕"/>
+                <a:ea typeface="맑은 고딕"/>
+                <a:cs typeface="맑은 고딕"/>
               </a:defRPr>
             </a:pPr>
             <a:r>
@@ -3888,7 +3924,9 @@
                 <a:solidFill>
                   <a:srgbClr val="14233D"/>
                 </a:solidFill>
-                <a:latin typeface="Noto Sans CJK KR"/>
+                <a:latin typeface="맑은 고딕"/>
+                <a:ea typeface="맑은 고딕"/>
+                <a:cs typeface="맑은 고딕"/>
               </a:defRPr>
             </a:pPr>
             <a:r>
@@ -3927,7 +3965,9 @@
                 <a:solidFill>
                   <a:srgbClr val="60718A"/>
                 </a:solidFill>
-                <a:latin typeface="Noto Sans CJK KR"/>
+                <a:latin typeface="맑은 고딕"/>
+                <a:ea typeface="맑은 고딕"/>
+                <a:cs typeface="맑은 고딕"/>
               </a:defRPr>
             </a:pPr>
             <a:r>
@@ -3943,7 +3983,9 @@
                 <a:solidFill>
                   <a:srgbClr val="60718A"/>
                 </a:solidFill>
-                <a:latin typeface="Noto Sans CJK KR"/>
+                <a:latin typeface="맑은 고딕"/>
+                <a:ea typeface="맑은 고딕"/>
+                <a:cs typeface="맑은 고딕"/>
               </a:defRPr>
             </a:pPr>
             <a:r>
@@ -4027,7 +4069,9 @@
                 <a:solidFill>
                   <a:srgbClr val="2962FF"/>
                 </a:solidFill>
-                <a:latin typeface="Noto Sans CJK KR"/>
+                <a:latin typeface="맑은 고딕"/>
+                <a:ea typeface="맑은 고딕"/>
+                <a:cs typeface="맑은 고딕"/>
               </a:defRPr>
             </a:pPr>
             <a:r>
@@ -4066,7 +4110,9 @@
                 <a:solidFill>
                   <a:srgbClr val="14233D"/>
                 </a:solidFill>
-                <a:latin typeface="Noto Sans CJK KR"/>
+                <a:latin typeface="맑은 고딕"/>
+                <a:ea typeface="맑은 고딕"/>
+                <a:cs typeface="맑은 고딕"/>
               </a:defRPr>
             </a:pPr>
             <a:r>
@@ -4105,7 +4151,9 @@
                 <a:solidFill>
                   <a:srgbClr val="60718A"/>
                 </a:solidFill>
-                <a:latin typeface="Noto Sans CJK KR"/>
+                <a:latin typeface="맑은 고딕"/>
+                <a:ea typeface="맑은 고딕"/>
+                <a:cs typeface="맑은 고딕"/>
               </a:defRPr>
             </a:pPr>
             <a:r>
@@ -4121,7 +4169,9 @@
                 <a:solidFill>
                   <a:srgbClr val="60718A"/>
                 </a:solidFill>
-                <a:latin typeface="Noto Sans CJK KR"/>
+                <a:latin typeface="맑은 고딕"/>
+                <a:ea typeface="맑은 고딕"/>
+                <a:cs typeface="맑은 고딕"/>
               </a:defRPr>
             </a:pPr>
             <a:r>
@@ -4205,7 +4255,9 @@
                 <a:solidFill>
                   <a:srgbClr val="2962FF"/>
                 </a:solidFill>
-                <a:latin typeface="Noto Sans CJK KR"/>
+                <a:latin typeface="맑은 고딕"/>
+                <a:ea typeface="맑은 고딕"/>
+                <a:cs typeface="맑은 고딕"/>
               </a:defRPr>
             </a:pPr>
             <a:r>
@@ -4244,7 +4296,9 @@
                 <a:solidFill>
                   <a:srgbClr val="14233D"/>
                 </a:solidFill>
-                <a:latin typeface="Noto Sans CJK KR"/>
+                <a:latin typeface="맑은 고딕"/>
+                <a:ea typeface="맑은 고딕"/>
+                <a:cs typeface="맑은 고딕"/>
               </a:defRPr>
             </a:pPr>
             <a:r>
@@ -4283,11 +4337,13 @@
                 <a:solidFill>
                   <a:srgbClr val="60718A"/>
                 </a:solidFill>
-                <a:latin typeface="Noto Sans CJK KR"/>
-              </a:defRPr>
-            </a:pPr>
-            <a:r>
-              <a:t>새 Job으로 실패·미실행 단계 처리</a:t>
+                <a:latin typeface="맑은 고딕"/>
+                <a:ea typeface="맑은 고딕"/>
+                <a:cs typeface="맑은 고딕"/>
+              </a:defRPr>
+            </a:pPr>
+            <a:r>
+              <a:t>새 Job이 실패·미실행 단계를 처리</a:t>
             </a:r>
           </a:p>
           <a:p>
@@ -4299,7 +4355,9 @@
                 <a:solidFill>
                   <a:srgbClr val="60718A"/>
                 </a:solidFill>
-                <a:latin typeface="Noto Sans CJK KR"/>
+                <a:latin typeface="맑은 고딕"/>
+                <a:ea typeface="맑은 고딕"/>
+                <a:cs typeface="맑은 고딕"/>
               </a:defRPr>
             </a:pPr>
             <a:r>
@@ -4338,11 +4396,13 @@
                 <a:solidFill>
                   <a:srgbClr val="60718A"/>
                 </a:solidFill>
-                <a:latin typeface="Noto Sans CJK KR"/>
-              </a:defRPr>
-            </a:pPr>
-            <a:r>
-              <a:t>대상: 실제 PowerShell의 실패·부분 성공 권한 Job. 프로젝트·Mock·진행 중 Job은 제외됩니다.</a:t>
+                <a:latin typeface="맑은 고딕"/>
+                <a:ea typeface="맑은 고딕"/>
+                <a:cs typeface="맑은 고딕"/>
+              </a:defRPr>
+            </a:pPr>
+            <a:r>
+              <a:t>대상: PowerShell 모드로 실행한 실패·부분 성공 권한 Job. 프로젝트·Mock·진행 중인 Job은 제외됩니다.</a:t>
             </a:r>
           </a:p>
         </p:txBody>
@@ -4403,7 +4463,9 @@
                 <a:solidFill>
                   <a:srgbClr val="2962FF"/>
                 </a:solidFill>
-                <a:latin typeface="Noto Sans CJK KR"/>
+                <a:latin typeface="맑은 고딕"/>
+                <a:ea typeface="맑은 고딕"/>
+                <a:cs typeface="맑은 고딕"/>
               </a:defRPr>
             </a:pPr>
             <a:r>
@@ -4442,7 +4504,9 @@
                 <a:solidFill>
                   <a:srgbClr val="14233D"/>
                 </a:solidFill>
-                <a:latin typeface="Noto Sans CJK KR"/>
+                <a:latin typeface="맑은 고딕"/>
+                <a:ea typeface="맑은 고딕"/>
+                <a:cs typeface="맑은 고딕"/>
               </a:defRPr>
             </a:pPr>
             <a:r>
@@ -4481,7 +4545,9 @@
                 <a:solidFill>
                   <a:srgbClr val="60718A"/>
                 </a:solidFill>
-                <a:latin typeface="Noto Sans CJK KR"/>
+                <a:latin typeface="맑은 고딕"/>
+                <a:ea typeface="맑은 고딕"/>
+                <a:cs typeface="맑은 고딕"/>
               </a:defRPr>
             </a:pPr>
             <a:r>
@@ -4520,7 +4586,9 @@
                 <a:solidFill>
                   <a:srgbClr val="60718A"/>
                 </a:solidFill>
-                <a:latin typeface="Noto Sans CJK KR"/>
+                <a:latin typeface="맑은 고딕"/>
+                <a:ea typeface="맑은 고딕"/>
+                <a:cs typeface="맑은 고딕"/>
               </a:defRPr>
             </a:pPr>
             <a:r>
@@ -4559,7 +4627,9 @@
                 <a:solidFill>
                   <a:srgbClr val="60718A"/>
                 </a:solidFill>
-                <a:latin typeface="Noto Sans CJK KR"/>
+                <a:latin typeface="맑은 고딕"/>
+                <a:ea typeface="맑은 고딕"/>
+                <a:cs typeface="맑은 고딕"/>
               </a:defRPr>
             </a:pPr>
             <a:r>
@@ -4643,7 +4713,9 @@
                 <a:solidFill>
                   <a:srgbClr val="2962FF"/>
                 </a:solidFill>
-                <a:latin typeface="Noto Sans CJK KR"/>
+                <a:latin typeface="맑은 고딕"/>
+                <a:ea typeface="맑은 고딕"/>
+                <a:cs typeface="맑은 고딕"/>
               </a:defRPr>
             </a:pPr>
             <a:r>
@@ -4682,7 +4754,9 @@
                 <a:solidFill>
                   <a:srgbClr val="14233D"/>
                 </a:solidFill>
-                <a:latin typeface="Noto Sans CJK KR"/>
+                <a:latin typeface="맑은 고딕"/>
+                <a:ea typeface="맑은 고딕"/>
+                <a:cs typeface="맑은 고딕"/>
               </a:defRPr>
             </a:pPr>
             <a:r>
@@ -4721,7 +4795,9 @@
                 <a:solidFill>
                   <a:srgbClr val="60718A"/>
                 </a:solidFill>
-                <a:latin typeface="Noto Sans CJK KR"/>
+                <a:latin typeface="맑은 고딕"/>
+                <a:ea typeface="맑은 고딕"/>
+                <a:cs typeface="맑은 고딕"/>
               </a:defRPr>
             </a:pPr>
             <a:r>
@@ -4737,11 +4813,13 @@
                 <a:solidFill>
                   <a:srgbClr val="60718A"/>
                 </a:solidFill>
-                <a:latin typeface="Noto Sans CJK KR"/>
-              </a:defRPr>
-            </a:pPr>
-            <a:r>
-              <a:t>BUS와 API 주소로 연결 가능한 네트워크</a:t>
+                <a:latin typeface="맑은 고딕"/>
+                <a:ea typeface="맑은 고딕"/>
+                <a:cs typeface="맑은 고딕"/>
+              </a:defRPr>
+            </a:pPr>
+            <a:r>
+              <a:t>BUS와 API 서버에 접속할 수 있는 네트워크</a:t>
             </a:r>
           </a:p>
           <a:p>
@@ -4753,11 +4831,13 @@
                 <a:solidFill>
                   <a:srgbClr val="60718A"/>
                 </a:solidFill>
-                <a:latin typeface="Noto Sans CJK KR"/>
-              </a:defRPr>
-            </a:pPr>
-            <a:r>
-              <a:t>API Key · BUS 계정 · 로컬 기록 폴더 쓰기 권한</a:t>
+                <a:latin typeface="맑은 고딕"/>
+                <a:ea typeface="맑은 고딕"/>
+                <a:cs typeface="맑은 고딕"/>
+              </a:defRPr>
+            </a:pPr>
+            <a:r>
+              <a:t>API Key · BUS 계정 · 로컬 로그 폴더 쓰기 권한</a:t>
             </a:r>
           </a:p>
         </p:txBody>
@@ -4837,7 +4917,9 @@
                 <a:solidFill>
                   <a:srgbClr val="2962FF"/>
                 </a:solidFill>
-                <a:latin typeface="Noto Sans CJK KR"/>
+                <a:latin typeface="맑은 고딕"/>
+                <a:ea typeface="맑은 고딕"/>
+                <a:cs typeface="맑은 고딕"/>
               </a:defRPr>
             </a:pPr>
             <a:r>
@@ -4876,7 +4958,9 @@
                 <a:solidFill>
                   <a:srgbClr val="14233D"/>
                 </a:solidFill>
-                <a:latin typeface="Noto Sans CJK KR"/>
+                <a:latin typeface="맑은 고딕"/>
+                <a:ea typeface="맑은 고딕"/>
+                <a:cs typeface="맑은 고딕"/>
               </a:defRPr>
             </a:pPr>
             <a:r>
@@ -4915,7 +4999,9 @@
                 <a:solidFill>
                   <a:srgbClr val="60718A"/>
                 </a:solidFill>
-                <a:latin typeface="Noto Sans CJK KR"/>
+                <a:latin typeface="맑은 고딕"/>
+                <a:ea typeface="맑은 고딕"/>
+                <a:cs typeface="맑은 고딕"/>
               </a:defRPr>
             </a:pPr>
             <a:r>
@@ -4931,7 +5017,9 @@
                 <a:solidFill>
                   <a:srgbClr val="60718A"/>
                 </a:solidFill>
-                <a:latin typeface="Noto Sans CJK KR"/>
+                <a:latin typeface="맑은 고딕"/>
+                <a:ea typeface="맑은 고딕"/>
+                <a:cs typeface="맑은 고딕"/>
               </a:defRPr>
             </a:pPr>
             <a:r>
@@ -4947,7 +5035,9 @@
                 <a:solidFill>
                   <a:srgbClr val="60718A"/>
                 </a:solidFill>
-                <a:latin typeface="Noto Sans CJK KR"/>
+                <a:latin typeface="맑은 고딕"/>
+                <a:ea typeface="맑은 고딕"/>
+                <a:cs typeface="맑은 고딕"/>
               </a:defRPr>
             </a:pPr>
             <a:r>
@@ -4986,7 +5076,9 @@
                 <a:solidFill>
                   <a:srgbClr val="60718A"/>
                 </a:solidFill>
-                <a:latin typeface="Noto Sans CJK KR"/>
+                <a:latin typeface="맑은 고딕"/>
+                <a:ea typeface="맑은 고딕"/>
+                <a:cs typeface="맑은 고딕"/>
               </a:defRPr>
             </a:pPr>
             <a:r>
@@ -5051,7 +5143,9 @@
                 <a:solidFill>
                   <a:srgbClr val="2962FF"/>
                 </a:solidFill>
-                <a:latin typeface="Noto Sans CJK KR"/>
+                <a:latin typeface="맑은 고딕"/>
+                <a:ea typeface="맑은 고딕"/>
+                <a:cs typeface="맑은 고딕"/>
               </a:defRPr>
             </a:pPr>
             <a:r>
@@ -5090,11 +5184,13 @@
                 <a:solidFill>
                   <a:srgbClr val="14233D"/>
                 </a:solidFill>
-                <a:latin typeface="Noto Sans CJK KR"/>
-              </a:defRPr>
-            </a:pPr>
-            <a:r>
-              <a:t>베타는 작은 범위에서 확인하며 엽니다</a:t>
+                <a:latin typeface="맑은 고딕"/>
+                <a:ea typeface="맑은 고딕"/>
+                <a:cs typeface="맑은 고딕"/>
+              </a:defRPr>
+            </a:pPr>
+            <a:r>
+              <a:t>작은 범위부터 검증하며 베타를 시작합니다</a:t>
             </a:r>
           </a:p>
         </p:txBody>
@@ -5129,7 +5225,9 @@
                 <a:solidFill>
                   <a:srgbClr val="60718A"/>
                 </a:solidFill>
-                <a:latin typeface="Noto Sans CJK KR"/>
+                <a:latin typeface="맑은 고딕"/>
+                <a:ea typeface="맑은 고딕"/>
+                <a:cs typeface="맑은 고딕"/>
               </a:defRPr>
             </a:pPr>
             <a:r>
@@ -5168,7 +5266,9 @@
                 <a:solidFill>
                   <a:srgbClr val="60718A"/>
                 </a:solidFill>
-                <a:latin typeface="Noto Sans CJK KR"/>
+                <a:latin typeface="맑은 고딕"/>
+                <a:ea typeface="맑은 고딕"/>
+                <a:cs typeface="맑은 고딕"/>
               </a:defRPr>
             </a:pPr>
             <a:r>
@@ -5207,7 +5307,9 @@
                 <a:solidFill>
                   <a:srgbClr val="60718A"/>
                 </a:solidFill>
-                <a:latin typeface="Noto Sans CJK KR"/>
+                <a:latin typeface="맑은 고딕"/>
+                <a:ea typeface="맑은 고딕"/>
+                <a:cs typeface="맑은 고딕"/>
               </a:defRPr>
             </a:pPr>
             <a:r>
@@ -5291,7 +5393,9 @@
                 <a:solidFill>
                   <a:srgbClr val="2962FF"/>
                 </a:solidFill>
-                <a:latin typeface="Noto Sans CJK KR"/>
+                <a:latin typeface="맑은 고딕"/>
+                <a:ea typeface="맑은 고딕"/>
+                <a:cs typeface="맑은 고딕"/>
               </a:defRPr>
             </a:pPr>
             <a:r>
@@ -5330,7 +5434,9 @@
                 <a:solidFill>
                   <a:srgbClr val="14233D"/>
                 </a:solidFill>
-                <a:latin typeface="Noto Sans CJK KR"/>
+                <a:latin typeface="맑은 고딕"/>
+                <a:ea typeface="맑은 고딕"/>
+                <a:cs typeface="맑은 고딕"/>
               </a:defRPr>
             </a:pPr>
             <a:r>
@@ -5369,7 +5475,9 @@
                 <a:solidFill>
                   <a:srgbClr val="60718A"/>
                 </a:solidFill>
-                <a:latin typeface="Noto Sans CJK KR"/>
+                <a:latin typeface="맑은 고딕"/>
+                <a:ea typeface="맑은 고딕"/>
+                <a:cs typeface="맑은 고딕"/>
               </a:defRPr>
             </a:pPr>
             <a:r>
@@ -5385,7 +5493,9 @@
                 <a:solidFill>
                   <a:srgbClr val="60718A"/>
                 </a:solidFill>
-                <a:latin typeface="Noto Sans CJK KR"/>
+                <a:latin typeface="맑은 고딕"/>
+                <a:ea typeface="맑은 고딕"/>
+                <a:cs typeface="맑은 고딕"/>
               </a:defRPr>
             </a:pPr>
             <a:r>
@@ -5469,7 +5579,9 @@
                 <a:solidFill>
                   <a:srgbClr val="2962FF"/>
                 </a:solidFill>
-                <a:latin typeface="Noto Sans CJK KR"/>
+                <a:latin typeface="맑은 고딕"/>
+                <a:ea typeface="맑은 고딕"/>
+                <a:cs typeface="맑은 고딕"/>
               </a:defRPr>
             </a:pPr>
             <a:r>
@@ -5508,7 +5620,9 @@
                 <a:solidFill>
                   <a:srgbClr val="14233D"/>
                 </a:solidFill>
-                <a:latin typeface="Noto Sans CJK KR"/>
+                <a:latin typeface="맑은 고딕"/>
+                <a:ea typeface="맑은 고딕"/>
+                <a:cs typeface="맑은 고딕"/>
               </a:defRPr>
             </a:pPr>
             <a:r>
@@ -5547,7 +5661,9 @@
                 <a:solidFill>
                   <a:srgbClr val="60718A"/>
                 </a:solidFill>
-                <a:latin typeface="Noto Sans CJK KR"/>
+                <a:latin typeface="맑은 고딕"/>
+                <a:ea typeface="맑은 고딕"/>
+                <a:cs typeface="맑은 고딕"/>
               </a:defRPr>
             </a:pPr>
             <a:r>
@@ -5563,7 +5679,9 @@
                 <a:solidFill>
                   <a:srgbClr val="60718A"/>
                 </a:solidFill>
-                <a:latin typeface="Noto Sans CJK KR"/>
+                <a:latin typeface="맑은 고딕"/>
+                <a:ea typeface="맑은 고딕"/>
+                <a:cs typeface="맑은 고딕"/>
               </a:defRPr>
             </a:pPr>
             <a:r>
@@ -5647,7 +5765,9 @@
                 <a:solidFill>
                   <a:srgbClr val="2962FF"/>
                 </a:solidFill>
-                <a:latin typeface="Noto Sans CJK KR"/>
+                <a:latin typeface="맑은 고딕"/>
+                <a:ea typeface="맑은 고딕"/>
+                <a:cs typeface="맑은 고딕"/>
               </a:defRPr>
             </a:pPr>
             <a:r>
@@ -5686,7 +5806,9 @@
                 <a:solidFill>
                   <a:srgbClr val="14233D"/>
                 </a:solidFill>
-                <a:latin typeface="Noto Sans CJK KR"/>
+                <a:latin typeface="맑은 고딕"/>
+                <a:ea typeface="맑은 고딕"/>
+                <a:cs typeface="맑은 고딕"/>
               </a:defRPr>
             </a:pPr>
             <a:r>
@@ -5725,7 +5847,9 @@
                 <a:solidFill>
                   <a:srgbClr val="60718A"/>
                 </a:solidFill>
-                <a:latin typeface="Noto Sans CJK KR"/>
+                <a:latin typeface="맑은 고딕"/>
+                <a:ea typeface="맑은 고딕"/>
+                <a:cs typeface="맑은 고딕"/>
               </a:defRPr>
             </a:pPr>
             <a:r>
@@ -5741,7 +5865,9 @@
                 <a:solidFill>
                   <a:srgbClr val="60718A"/>
                 </a:solidFill>
-                <a:latin typeface="Noto Sans CJK KR"/>
+                <a:latin typeface="맑은 고딕"/>
+                <a:ea typeface="맑은 고딕"/>
+                <a:cs typeface="맑은 고딕"/>
               </a:defRPr>
             </a:pPr>
             <a:r>
@@ -5825,7 +5951,9 @@
                 <a:solidFill>
                   <a:srgbClr val="2962FF"/>
                 </a:solidFill>
-                <a:latin typeface="Noto Sans CJK KR"/>
+                <a:latin typeface="맑은 고딕"/>
+                <a:ea typeface="맑은 고딕"/>
+                <a:cs typeface="맑은 고딕"/>
               </a:defRPr>
             </a:pPr>
             <a:r>
@@ -5864,7 +5992,9 @@
                 <a:solidFill>
                   <a:srgbClr val="14233D"/>
                 </a:solidFill>
-                <a:latin typeface="Noto Sans CJK KR"/>
+                <a:latin typeface="맑은 고딕"/>
+                <a:ea typeface="맑은 고딕"/>
+                <a:cs typeface="맑은 고딕"/>
               </a:defRPr>
             </a:pPr>
             <a:r>
@@ -5903,7 +6033,9 @@
                 <a:solidFill>
                   <a:srgbClr val="60718A"/>
                 </a:solidFill>
-                <a:latin typeface="Noto Sans CJK KR"/>
+                <a:latin typeface="맑은 고딕"/>
+                <a:ea typeface="맑은 고딕"/>
+                <a:cs typeface="맑은 고딕"/>
               </a:defRPr>
             </a:pPr>
             <a:r>
@@ -5919,7 +6051,9 @@
                 <a:solidFill>
                   <a:srgbClr val="60718A"/>
                 </a:solidFill>
-                <a:latin typeface="Noto Sans CJK KR"/>
+                <a:latin typeface="맑은 고딕"/>
+                <a:ea typeface="맑은 고딕"/>
+                <a:cs typeface="맑은 고딕"/>
               </a:defRPr>
             </a:pPr>
             <a:r>
@@ -5958,11 +6092,13 @@
                 <a:solidFill>
                   <a:srgbClr val="60718A"/>
                 </a:solidFill>
-                <a:latin typeface="Noto Sans CJK KR"/>
-              </a:defRPr>
-            </a:pPr>
-            <a:r>
-              <a:t>자동 검증: API 60개 / Client 93개 통과. 실제 Windows·BUS·AD 연동은 별도 시험 대상입니다.</a:t>
+                <a:latin typeface="맑은 고딕"/>
+                <a:ea typeface="맑은 고딕"/>
+                <a:cs typeface="맑은 고딕"/>
+              </a:defRPr>
+            </a:pPr>
+            <a:r>
+              <a:t>자동 테스트: API 60개 / Client 93개 통과. 실제 Windows·BUS·AD 연동은 별도로 시험해야 합니다.</a:t>
             </a:r>
           </a:p>
         </p:txBody>
@@ -6023,7 +6159,9 @@
                 <a:solidFill>
                   <a:srgbClr val="8DB1FF"/>
                 </a:solidFill>
-                <a:latin typeface="Noto Sans CJK KR"/>
+                <a:latin typeface="맑은 고딕"/>
+                <a:ea typeface="맑은 고딕"/>
+                <a:cs typeface="맑은 고딕"/>
               </a:defRPr>
             </a:pPr>
             <a:r>
@@ -6062,7 +6200,9 @@
                 <a:solidFill>
                   <a:srgbClr val="FFFFFF"/>
                 </a:solidFill>
-                <a:latin typeface="Noto Sans CJK KR"/>
+                <a:latin typeface="맑은 고딕"/>
+                <a:ea typeface="맑은 고딕"/>
+                <a:cs typeface="맑은 고딕"/>
               </a:defRPr>
             </a:pPr>
             <a:r>
@@ -6101,11 +6241,13 @@
                 <a:solidFill>
                   <a:srgbClr val="B7C7DF"/>
                 </a:solidFill>
-                <a:latin typeface="Noto Sans CJK KR"/>
-              </a:defRPr>
-            </a:pPr>
-            <a:r>
-              <a:t>자동 복구와 권한 분리는 후속 개선 과제입니다. 아래 항목은 구현 완료 기능이 아닙니다.</a:t>
+                <a:latin typeface="맑은 고딕"/>
+                <a:ea typeface="맑은 고딕"/>
+                <a:cs typeface="맑은 고딕"/>
+              </a:defRPr>
+            </a:pPr>
+            <a:r>
+              <a:t>자동 복구와 권한 분리는 후속 개선 과제입니다. 아래 항목은 구현이 끝난 기능이 아닙니다.</a:t>
             </a:r>
           </a:p>
         </p:txBody>
@@ -6140,7 +6282,9 @@
                 <a:solidFill>
                   <a:srgbClr val="91A6C4"/>
                 </a:solidFill>
-                <a:latin typeface="Noto Sans CJK KR"/>
+                <a:latin typeface="맑은 고딕"/>
+                <a:ea typeface="맑은 고딕"/>
+                <a:cs typeface="맑은 고딕"/>
               </a:defRPr>
             </a:pPr>
             <a:r>
@@ -6179,7 +6323,9 @@
                 <a:solidFill>
                   <a:srgbClr val="91A6C4"/>
                 </a:solidFill>
-                <a:latin typeface="Noto Sans CJK KR"/>
+                <a:latin typeface="맑은 고딕"/>
+                <a:ea typeface="맑은 고딕"/>
+                <a:cs typeface="맑은 고딕"/>
               </a:defRPr>
             </a:pPr>
             <a:r>
@@ -6263,7 +6409,9 @@
                 <a:solidFill>
                   <a:srgbClr val="8DB1FF"/>
                 </a:solidFill>
-                <a:latin typeface="Noto Sans CJK KR"/>
+                <a:latin typeface="맑은 고딕"/>
+                <a:ea typeface="맑은 고딕"/>
+                <a:cs typeface="맑은 고딕"/>
               </a:defRPr>
             </a:pPr>
             <a:r>
@@ -6302,7 +6450,9 @@
                 <a:solidFill>
                   <a:srgbClr val="FFFFFF"/>
                 </a:solidFill>
-                <a:latin typeface="Noto Sans CJK KR"/>
+                <a:latin typeface="맑은 고딕"/>
+                <a:ea typeface="맑은 고딕"/>
+                <a:cs typeface="맑은 고딕"/>
               </a:defRPr>
             </a:pPr>
             <a:r>
@@ -6341,11 +6491,13 @@
                 <a:solidFill>
                   <a:srgbClr val="D1DDEF"/>
                 </a:solidFill>
-                <a:latin typeface="Noto Sans CJK KR"/>
-              </a:defRPr>
-            </a:pPr>
-            <a:r>
-              <a:t>API 재시작 후 진행 Job 자동 복구 없음</a:t>
+                <a:latin typeface="맑은 고딕"/>
+                <a:ea typeface="맑은 고딕"/>
+                <a:cs typeface="맑은 고딕"/>
+              </a:defRPr>
+            </a:pPr>
+            <a:r>
+              <a:t>API 재시작 시 진행 중이던 Job 자동 복구 없음</a:t>
             </a:r>
           </a:p>
           <a:p>
@@ -6357,7 +6509,9 @@
                 <a:solidFill>
                   <a:srgbClr val="D1DDEF"/>
                 </a:solidFill>
-                <a:latin typeface="Noto Sans CJK KR"/>
+                <a:latin typeface="맑은 고딕"/>
+                <a:ea typeface="맑은 고딕"/>
+                <a:cs typeface="맑은 고딕"/>
               </a:defRPr>
             </a:pPr>
             <a:r>
@@ -6373,7 +6527,9 @@
                 <a:solidFill>
                   <a:srgbClr val="D1DDEF"/>
                 </a:solidFill>
-                <a:latin typeface="Noto Sans CJK KR"/>
+                <a:latin typeface="맑은 고딕"/>
+                <a:ea typeface="맑은 고딕"/>
+                <a:cs typeface="맑은 고딕"/>
               </a:defRPr>
             </a:pPr>
             <a:r>
@@ -6457,7 +6613,9 @@
                 <a:solidFill>
                   <a:srgbClr val="8DB1FF"/>
                 </a:solidFill>
-                <a:latin typeface="Noto Sans CJK KR"/>
+                <a:latin typeface="맑은 고딕"/>
+                <a:ea typeface="맑은 고딕"/>
+                <a:cs typeface="맑은 고딕"/>
               </a:defRPr>
             </a:pPr>
             <a:r>
@@ -6496,11 +6654,13 @@
                 <a:solidFill>
                   <a:srgbClr val="FFFFFF"/>
                 </a:solidFill>
-                <a:latin typeface="Noto Sans CJK KR"/>
-              </a:defRPr>
-            </a:pPr>
-            <a:r>
-              <a:t>검증 결과에 따라 우선순위 결정</a:t>
+                <a:latin typeface="맑은 고딕"/>
+                <a:ea typeface="맑은 고딕"/>
+                <a:cs typeface="맑은 고딕"/>
+              </a:defRPr>
+            </a:pPr>
+            <a:r>
+              <a:t>검증 결과에 따라 우선순위를 정합니다</a:t>
             </a:r>
           </a:p>
         </p:txBody>
@@ -6535,7 +6695,9 @@
                 <a:solidFill>
                   <a:srgbClr val="D1DDEF"/>
                 </a:solidFill>
-                <a:latin typeface="Noto Sans CJK KR"/>
+                <a:latin typeface="맑은 고딕"/>
+                <a:ea typeface="맑은 고딕"/>
+                <a:cs typeface="맑은 고딕"/>
               </a:defRPr>
             </a:pPr>
             <a:r>
@@ -6551,7 +6713,9 @@
                 <a:solidFill>
                   <a:srgbClr val="D1DDEF"/>
                 </a:solidFill>
-                <a:latin typeface="Noto Sans CJK KR"/>
+                <a:latin typeface="맑은 고딕"/>
+                <a:ea typeface="맑은 고딕"/>
+                <a:cs typeface="맑은 고딕"/>
               </a:defRPr>
             </a:pPr>
             <a:r>
@@ -6567,7 +6731,9 @@
                 <a:solidFill>
                   <a:srgbClr val="D1DDEF"/>
                 </a:solidFill>
-                <a:latin typeface="Noto Sans CJK KR"/>
+                <a:latin typeface="맑은 고딕"/>
+                <a:ea typeface="맑은 고딕"/>
+                <a:cs typeface="맑은 고딕"/>
               </a:defRPr>
             </a:pPr>
             <a:r>
@@ -6632,7 +6798,9 @@
                 <a:solidFill>
                   <a:srgbClr val="2962FF"/>
                 </a:solidFill>
-                <a:latin typeface="Noto Sans CJK KR"/>
+                <a:latin typeface="맑은 고딕"/>
+                <a:ea typeface="맑은 고딕"/>
+                <a:cs typeface="맑은 고딕"/>
               </a:defRPr>
             </a:pPr>
             <a:r>
@@ -6671,7 +6839,9 @@
                 <a:solidFill>
                   <a:srgbClr val="14233D"/>
                 </a:solidFill>
-                <a:latin typeface="Noto Sans CJK KR"/>
+                <a:latin typeface="맑은 고딕"/>
+                <a:ea typeface="맑은 고딕"/>
+                <a:cs typeface="맑은 고딕"/>
               </a:defRPr>
             </a:pPr>
             <a:r>
@@ -6710,7 +6880,9 @@
                 <a:solidFill>
                   <a:srgbClr val="60718A"/>
                 </a:solidFill>
-                <a:latin typeface="Noto Sans CJK KR"/>
+                <a:latin typeface="맑은 고딕"/>
+                <a:ea typeface="맑은 고딕"/>
+                <a:cs typeface="맑은 고딕"/>
               </a:defRPr>
             </a:pPr>
             <a:r>
@@ -6749,7 +6921,9 @@
                 <a:solidFill>
                   <a:srgbClr val="60718A"/>
                 </a:solidFill>
-                <a:latin typeface="Noto Sans CJK KR"/>
+                <a:latin typeface="맑은 고딕"/>
+                <a:ea typeface="맑은 고딕"/>
+                <a:cs typeface="맑은 고딕"/>
               </a:defRPr>
             </a:pPr>
             <a:r>
@@ -6788,7 +6962,9 @@
                 <a:solidFill>
                   <a:srgbClr val="60718A"/>
                 </a:solidFill>
-                <a:latin typeface="Noto Sans CJK KR"/>
+                <a:latin typeface="맑은 고딕"/>
+                <a:ea typeface="맑은 고딕"/>
+                <a:cs typeface="맑은 고딕"/>
               </a:defRPr>
             </a:pPr>
             <a:r>
@@ -6872,7 +7048,9 @@
                 <a:solidFill>
                   <a:srgbClr val="2962FF"/>
                 </a:solidFill>
-                <a:latin typeface="Noto Sans CJK KR"/>
+                <a:latin typeface="맑은 고딕"/>
+                <a:ea typeface="맑은 고딕"/>
+                <a:cs typeface="맑은 고딕"/>
               </a:defRPr>
             </a:pPr>
             <a:r>
@@ -6911,7 +7089,9 @@
                 <a:solidFill>
                   <a:srgbClr val="14233D"/>
                 </a:solidFill>
-                <a:latin typeface="Noto Sans CJK KR"/>
+                <a:latin typeface="맑은 고딕"/>
+                <a:ea typeface="맑은 고딕"/>
+                <a:cs typeface="맑은 고딕"/>
               </a:defRPr>
             </a:pPr>
             <a:r>
@@ -6950,7 +7130,9 @@
                 <a:solidFill>
                   <a:srgbClr val="60718A"/>
                 </a:solidFill>
-                <a:latin typeface="Noto Sans CJK KR"/>
+                <a:latin typeface="맑은 고딕"/>
+                <a:ea typeface="맑은 고딕"/>
+                <a:cs typeface="맑은 고딕"/>
               </a:defRPr>
             </a:pPr>
             <a:r>
@@ -6966,7 +7148,9 @@
                 <a:solidFill>
                   <a:srgbClr val="60718A"/>
                 </a:solidFill>
-                <a:latin typeface="Noto Sans CJK KR"/>
+                <a:latin typeface="맑은 고딕"/>
+                <a:ea typeface="맑은 고딕"/>
+                <a:cs typeface="맑은 고딕"/>
               </a:defRPr>
             </a:pPr>
             <a:r>
@@ -6982,7 +7166,9 @@
                 <a:solidFill>
                   <a:srgbClr val="60718A"/>
                 </a:solidFill>
-                <a:latin typeface="Noto Sans CJK KR"/>
+                <a:latin typeface="맑은 고딕"/>
+                <a:ea typeface="맑은 고딕"/>
+                <a:cs typeface="맑은 고딕"/>
               </a:defRPr>
             </a:pPr>
             <a:r>
@@ -7066,7 +7252,9 @@
                 <a:solidFill>
                   <a:srgbClr val="2962FF"/>
                 </a:solidFill>
-                <a:latin typeface="Noto Sans CJK KR"/>
+                <a:latin typeface="맑은 고딕"/>
+                <a:ea typeface="맑은 고딕"/>
+                <a:cs typeface="맑은 고딕"/>
               </a:defRPr>
             </a:pPr>
             <a:r>
@@ -7105,7 +7293,9 @@
                 <a:solidFill>
                   <a:srgbClr val="14233D"/>
                 </a:solidFill>
-                <a:latin typeface="Noto Sans CJK KR"/>
+                <a:latin typeface="맑은 고딕"/>
+                <a:ea typeface="맑은 고딕"/>
+                <a:cs typeface="맑은 고딕"/>
               </a:defRPr>
             </a:pPr>
             <a:r>
@@ -7144,7 +7334,9 @@
                 <a:solidFill>
                   <a:srgbClr val="60718A"/>
                 </a:solidFill>
-                <a:latin typeface="Noto Sans CJK KR"/>
+                <a:latin typeface="맑은 고딕"/>
+                <a:ea typeface="맑은 고딕"/>
+                <a:cs typeface="맑은 고딕"/>
               </a:defRPr>
             </a:pPr>
             <a:r>
@@ -7160,7 +7352,9 @@
                 <a:solidFill>
                   <a:srgbClr val="60718A"/>
                 </a:solidFill>
-                <a:latin typeface="Noto Sans CJK KR"/>
+                <a:latin typeface="맑은 고딕"/>
+                <a:ea typeface="맑은 고딕"/>
+                <a:cs typeface="맑은 고딕"/>
               </a:defRPr>
             </a:pPr>
             <a:r>
@@ -7176,7 +7370,9 @@
                 <a:solidFill>
                   <a:srgbClr val="60718A"/>
                 </a:solidFill>
-                <a:latin typeface="Noto Sans CJK KR"/>
+                <a:latin typeface="맑은 고딕"/>
+                <a:ea typeface="맑은 고딕"/>
+                <a:cs typeface="맑은 고딕"/>
               </a:defRPr>
             </a:pPr>
             <a:r>
@@ -7215,11 +7411,13 @@
                 <a:solidFill>
                   <a:srgbClr val="60718A"/>
                 </a:solidFill>
-                <a:latin typeface="Noto Sans CJK KR"/>
-              </a:defRPr>
-            </a:pPr>
-            <a:r>
-              <a:t>피드백에는 발생 시각·버전·기대/실제 결과·request_id/job_id를 포함하고 키·암호는 제거하세요.</a:t>
+                <a:latin typeface="맑은 고딕"/>
+                <a:ea typeface="맑은 고딕"/>
+                <a:cs typeface="맑은 고딕"/>
+              </a:defRPr>
+            </a:pPr>
+            <a:r>
+              <a:t>피드백에는 발생 시각, 버전, 기대·실제 결과, request_id/job_id를 포함하되 키와 암호는 제거하세요.</a:t>
             </a:r>
           </a:p>
         </p:txBody>
@@ -7280,7 +7478,9 @@
                 <a:solidFill>
                   <a:srgbClr val="2962FF"/>
                 </a:solidFill>
-                <a:latin typeface="Noto Sans CJK KR"/>
+                <a:latin typeface="맑은 고딕"/>
+                <a:ea typeface="맑은 고딕"/>
+                <a:cs typeface="맑은 고딕"/>
               </a:defRPr>
             </a:pPr>
             <a:r>
@@ -7319,7 +7519,9 @@
                 <a:solidFill>
                   <a:srgbClr val="14233D"/>
                 </a:solidFill>
-                <a:latin typeface="Noto Sans CJK KR"/>
+                <a:latin typeface="맑은 고딕"/>
+                <a:ea typeface="맑은 고딕"/>
+                <a:cs typeface="맑은 고딕"/>
               </a:defRPr>
             </a:pPr>
             <a:r>
@@ -7358,7 +7560,9 @@
                 <a:solidFill>
                   <a:srgbClr val="60718A"/>
                 </a:solidFill>
-                <a:latin typeface="Noto Sans CJK KR"/>
+                <a:latin typeface="맑은 고딕"/>
+                <a:ea typeface="맑은 고딕"/>
+                <a:cs typeface="맑은 고딕"/>
               </a:defRPr>
             </a:pPr>
             <a:r>
@@ -7397,7 +7601,9 @@
                 <a:solidFill>
                   <a:srgbClr val="60718A"/>
                 </a:solidFill>
-                <a:latin typeface="Noto Sans CJK KR"/>
+                <a:latin typeface="맑은 고딕"/>
+                <a:ea typeface="맑은 고딕"/>
+                <a:cs typeface="맑은 고딕"/>
               </a:defRPr>
             </a:pPr>
             <a:r>
@@ -7436,7 +7642,9 @@
                 <a:solidFill>
                   <a:srgbClr val="60718A"/>
                 </a:solidFill>
-                <a:latin typeface="Noto Sans CJK KR"/>
+                <a:latin typeface="맑은 고딕"/>
+                <a:ea typeface="맑은 고딕"/>
+                <a:cs typeface="맑은 고딕"/>
               </a:defRPr>
             </a:pPr>
             <a:r>
@@ -7520,7 +7728,9 @@
                 <a:solidFill>
                   <a:srgbClr val="2962FF"/>
                 </a:solidFill>
-                <a:latin typeface="Noto Sans CJK KR"/>
+                <a:latin typeface="맑은 고딕"/>
+                <a:ea typeface="맑은 고딕"/>
+                <a:cs typeface="맑은 고딕"/>
               </a:defRPr>
             </a:pPr>
             <a:r>
@@ -7559,7 +7769,9 @@
                 <a:solidFill>
                   <a:srgbClr val="14233D"/>
                 </a:solidFill>
-                <a:latin typeface="Noto Sans CJK KR"/>
+                <a:latin typeface="맑은 고딕"/>
+                <a:ea typeface="맑은 고딕"/>
+                <a:cs typeface="맑은 고딕"/>
               </a:defRPr>
             </a:pPr>
             <a:r>
@@ -7598,7 +7810,9 @@
                 <a:solidFill>
                   <a:srgbClr val="60718A"/>
                 </a:solidFill>
-                <a:latin typeface="Noto Sans CJK KR"/>
+                <a:latin typeface="맑은 고딕"/>
+                <a:ea typeface="맑은 고딕"/>
+                <a:cs typeface="맑은 고딕"/>
               </a:defRPr>
             </a:pPr>
             <a:r>
@@ -7614,7 +7828,9 @@
                 <a:solidFill>
                   <a:srgbClr val="60718A"/>
                 </a:solidFill>
-                <a:latin typeface="Noto Sans CJK KR"/>
+                <a:latin typeface="맑은 고딕"/>
+                <a:ea typeface="맑은 고딕"/>
+                <a:cs typeface="맑은 고딕"/>
               </a:defRPr>
             </a:pPr>
             <a:r>
@@ -7698,7 +7914,9 @@
                 <a:solidFill>
                   <a:srgbClr val="2962FF"/>
                 </a:solidFill>
-                <a:latin typeface="Noto Sans CJK KR"/>
+                <a:latin typeface="맑은 고딕"/>
+                <a:ea typeface="맑은 고딕"/>
+                <a:cs typeface="맑은 고딕"/>
               </a:defRPr>
             </a:pPr>
             <a:r>
@@ -7737,11 +7955,13 @@
                 <a:solidFill>
                   <a:srgbClr val="14233D"/>
                 </a:solidFill>
-                <a:latin typeface="Noto Sans CJK KR"/>
-              </a:defRPr>
-            </a:pPr>
-            <a:r>
-              <a:t>권한 정책을 서버에</a:t>
+                <a:latin typeface="맑은 고딕"/>
+                <a:ea typeface="맑은 고딕"/>
+                <a:cs typeface="맑은 고딕"/>
+              </a:defRPr>
+            </a:pPr>
+            <a:r>
+              <a:t>권한 처리는 서버에서</a:t>
             </a:r>
           </a:p>
         </p:txBody>
@@ -7776,7 +7996,9 @@
                 <a:solidFill>
                   <a:srgbClr val="60718A"/>
                 </a:solidFill>
-                <a:latin typeface="Noto Sans CJK KR"/>
+                <a:latin typeface="맑은 고딕"/>
+                <a:ea typeface="맑은 고딕"/>
+                <a:cs typeface="맑은 고딕"/>
               </a:defRPr>
             </a:pPr>
             <a:r>
@@ -7792,7 +8014,9 @@
                 <a:solidFill>
                   <a:srgbClr val="60718A"/>
                 </a:solidFill>
-                <a:latin typeface="Noto Sans CJK KR"/>
+                <a:latin typeface="맑은 고딕"/>
+                <a:ea typeface="맑은 고딕"/>
+                <a:cs typeface="맑은 고딕"/>
               </a:defRPr>
             </a:pPr>
             <a:r>
@@ -7876,7 +8100,9 @@
                 <a:solidFill>
                   <a:srgbClr val="2962FF"/>
                 </a:solidFill>
-                <a:latin typeface="Noto Sans CJK KR"/>
+                <a:latin typeface="맑은 고딕"/>
+                <a:ea typeface="맑은 고딕"/>
+                <a:cs typeface="맑은 고딕"/>
               </a:defRPr>
             </a:pPr>
             <a:r>
@@ -7915,7 +8141,9 @@
                 <a:solidFill>
                   <a:srgbClr val="14233D"/>
                 </a:solidFill>
-                <a:latin typeface="Noto Sans CJK KR"/>
+                <a:latin typeface="맑은 고딕"/>
+                <a:ea typeface="맑은 고딕"/>
+                <a:cs typeface="맑은 고딕"/>
               </a:defRPr>
             </a:pPr>
             <a:r>
@@ -7954,7 +8182,9 @@
                 <a:solidFill>
                   <a:srgbClr val="60718A"/>
                 </a:solidFill>
-                <a:latin typeface="Noto Sans CJK KR"/>
+                <a:latin typeface="맑은 고딕"/>
+                <a:ea typeface="맑은 고딕"/>
+                <a:cs typeface="맑은 고딕"/>
               </a:defRPr>
             </a:pPr>
             <a:r>
@@ -7970,7 +8200,9 @@
                 <a:solidFill>
                   <a:srgbClr val="60718A"/>
                 </a:solidFill>
-                <a:latin typeface="Noto Sans CJK KR"/>
+                <a:latin typeface="맑은 고딕"/>
+                <a:ea typeface="맑은 고딕"/>
+                <a:cs typeface="맑은 고딕"/>
               </a:defRPr>
             </a:pPr>
             <a:r>
@@ -8035,7 +8267,9 @@
                 <a:solidFill>
                   <a:srgbClr val="2962FF"/>
                 </a:solidFill>
-                <a:latin typeface="Noto Sans CJK KR"/>
+                <a:latin typeface="맑은 고딕"/>
+                <a:ea typeface="맑은 고딕"/>
+                <a:cs typeface="맑은 고딕"/>
               </a:defRPr>
             </a:pPr>
             <a:r>
@@ -8074,7 +8308,9 @@
                 <a:solidFill>
                   <a:srgbClr val="14233D"/>
                 </a:solidFill>
-                <a:latin typeface="Noto Sans CJK KR"/>
+                <a:latin typeface="맑은 고딕"/>
+                <a:ea typeface="맑은 고딕"/>
+                <a:cs typeface="맑은 고딕"/>
               </a:defRPr>
             </a:pPr>
             <a:r>
@@ -8113,11 +8349,13 @@
                 <a:solidFill>
                   <a:srgbClr val="60718A"/>
                 </a:solidFill>
-                <a:latin typeface="Noto Sans CJK KR"/>
-              </a:defRPr>
-            </a:pPr>
-            <a:r>
-              <a:t>Client는 BUS와 통신하고, API 서버는 AD·공유 폴더 작업과 이력을 담당합니다.</a:t>
+                <a:latin typeface="맑은 고딕"/>
+                <a:ea typeface="맑은 고딕"/>
+                <a:cs typeface="맑은 고딕"/>
+              </a:defRPr>
+            </a:pPr>
+            <a:r>
+              <a:t>Client는 BUS와 연동하고, API 서버는 AD·공유 폴더 작업과 이력 관리를 담당합니다.</a:t>
             </a:r>
           </a:p>
         </p:txBody>
@@ -8152,7 +8390,9 @@
                 <a:solidFill>
                   <a:srgbClr val="60718A"/>
                 </a:solidFill>
-                <a:latin typeface="Noto Sans CJK KR"/>
+                <a:latin typeface="맑은 고딕"/>
+                <a:ea typeface="맑은 고딕"/>
+                <a:cs typeface="맑은 고딕"/>
               </a:defRPr>
             </a:pPr>
             <a:r>
@@ -8191,7 +8431,9 @@
                 <a:solidFill>
                   <a:srgbClr val="60718A"/>
                 </a:solidFill>
-                <a:latin typeface="Noto Sans CJK KR"/>
+                <a:latin typeface="맑은 고딕"/>
+                <a:ea typeface="맑은 고딕"/>
+                <a:cs typeface="맑은 고딕"/>
               </a:defRPr>
             </a:pPr>
             <a:r>
@@ -8254,11 +8496,13 @@
                 <a:solidFill>
                   <a:srgbClr val="2962FF"/>
                 </a:solidFill>
-                <a:latin typeface="Noto Sans CJK KR"/>
-              </a:defRPr>
-            </a:pPr>
-            <a:r>
-              <a:t>BUS 완료는 API 작업 성공과 별도 단계이며, 실제 성공을 확인한 요청만 처리합니다.</a:t>
+                <a:latin typeface="맑은 고딕"/>
+                <a:ea typeface="맑은 고딕"/>
+                <a:cs typeface="맑은 고딕"/>
+              </a:defRPr>
+            </a:pPr>
+            <a:r>
+              <a:t>BUS 완료는 API 작업 성공과 별개의 단계이며, 실제 성공이 확인된 요청만 처리합니다.</a:t>
             </a:r>
           </a:p>
         </p:txBody>
@@ -8319,7 +8563,9 @@
                 <a:solidFill>
                   <a:srgbClr val="2962FF"/>
                 </a:solidFill>
-                <a:latin typeface="Noto Sans CJK KR"/>
+                <a:latin typeface="맑은 고딕"/>
+                <a:ea typeface="맑은 고딕"/>
+                <a:cs typeface="맑은 고딕"/>
               </a:defRPr>
             </a:pPr>
             <a:r>
@@ -8358,11 +8604,13 @@
                 <a:solidFill>
                   <a:srgbClr val="14233D"/>
                 </a:solidFill>
-                <a:latin typeface="Noto Sans CJK KR"/>
-              </a:defRPr>
-            </a:pPr>
-            <a:r>
-              <a:t>API와 Client, 맡은 일이 명확합니다</a:t>
+                <a:latin typeface="맑은 고딕"/>
+                <a:ea typeface="맑은 고딕"/>
+                <a:cs typeface="맑은 고딕"/>
+              </a:defRPr>
+            </a:pPr>
+            <a:r>
+              <a:t>API와 Client의 역할이 명확합니다</a:t>
             </a:r>
           </a:p>
         </p:txBody>
@@ -8397,7 +8645,9 @@
                 <a:solidFill>
                   <a:srgbClr val="60718A"/>
                 </a:solidFill>
-                <a:latin typeface="Noto Sans CJK KR"/>
+                <a:latin typeface="맑은 고딕"/>
+                <a:ea typeface="맑은 고딕"/>
+                <a:cs typeface="맑은 고딕"/>
               </a:defRPr>
             </a:pPr>
             <a:r>
@@ -8436,7 +8686,9 @@
                 <a:solidFill>
                   <a:srgbClr val="60718A"/>
                 </a:solidFill>
-                <a:latin typeface="Noto Sans CJK KR"/>
+                <a:latin typeface="맑은 고딕"/>
+                <a:ea typeface="맑은 고딕"/>
+                <a:cs typeface="맑은 고딕"/>
               </a:defRPr>
             </a:pPr>
             <a:r>
@@ -8475,7 +8727,9 @@
                 <a:solidFill>
                   <a:srgbClr val="60718A"/>
                 </a:solidFill>
-                <a:latin typeface="Noto Sans CJK KR"/>
+                <a:latin typeface="맑은 고딕"/>
+                <a:ea typeface="맑은 고딕"/>
+                <a:cs typeface="맑은 고딕"/>
               </a:defRPr>
             </a:pPr>
             <a:r>
@@ -8559,7 +8813,9 @@
                 <a:solidFill>
                   <a:srgbClr val="2962FF"/>
                 </a:solidFill>
-                <a:latin typeface="Noto Sans CJK KR"/>
+                <a:latin typeface="맑은 고딕"/>
+                <a:ea typeface="맑은 고딕"/>
+                <a:cs typeface="맑은 고딕"/>
               </a:defRPr>
             </a:pPr>
             <a:r>
@@ -8598,7 +8854,9 @@
                 <a:solidFill>
                   <a:srgbClr val="14233D"/>
                 </a:solidFill>
-                <a:latin typeface="Noto Sans CJK KR"/>
+                <a:latin typeface="맑은 고딕"/>
+                <a:ea typeface="맑은 고딕"/>
+                <a:cs typeface="맑은 고딕"/>
               </a:defRPr>
             </a:pPr>
             <a:r>
@@ -8637,7 +8895,9 @@
                 <a:solidFill>
                   <a:srgbClr val="60718A"/>
                 </a:solidFill>
-                <a:latin typeface="Noto Sans CJK KR"/>
+                <a:latin typeface="맑은 고딕"/>
+                <a:ea typeface="맑은 고딕"/>
+                <a:cs typeface="맑은 고딕"/>
               </a:defRPr>
             </a:pPr>
             <a:r>
@@ -8653,7 +8913,9 @@
                 <a:solidFill>
                   <a:srgbClr val="60718A"/>
                 </a:solidFill>
-                <a:latin typeface="Noto Sans CJK KR"/>
+                <a:latin typeface="맑은 고딕"/>
+                <a:ea typeface="맑은 고딕"/>
+                <a:cs typeface="맑은 고딕"/>
               </a:defRPr>
             </a:pPr>
             <a:r>
@@ -8669,7 +8931,9 @@
                 <a:solidFill>
                   <a:srgbClr val="60718A"/>
                 </a:solidFill>
-                <a:latin typeface="Noto Sans CJK KR"/>
+                <a:latin typeface="맑은 고딕"/>
+                <a:ea typeface="맑은 고딕"/>
+                <a:cs typeface="맑은 고딕"/>
               </a:defRPr>
             </a:pPr>
             <a:r>
@@ -8753,7 +9017,9 @@
                 <a:solidFill>
                   <a:srgbClr val="2962FF"/>
                 </a:solidFill>
-                <a:latin typeface="Noto Sans CJK KR"/>
+                <a:latin typeface="맑은 고딕"/>
+                <a:ea typeface="맑은 고딕"/>
+                <a:cs typeface="맑은 고딕"/>
               </a:defRPr>
             </a:pPr>
             <a:r>
@@ -8792,7 +9058,9 @@
                 <a:solidFill>
                   <a:srgbClr val="14233D"/>
                 </a:solidFill>
-                <a:latin typeface="Noto Sans CJK KR"/>
+                <a:latin typeface="맑은 고딕"/>
+                <a:ea typeface="맑은 고딕"/>
+                <a:cs typeface="맑은 고딕"/>
               </a:defRPr>
             </a:pPr>
             <a:r>
@@ -8831,7 +9099,9 @@
                 <a:solidFill>
                   <a:srgbClr val="60718A"/>
                 </a:solidFill>
-                <a:latin typeface="Noto Sans CJK KR"/>
+                <a:latin typeface="맑은 고딕"/>
+                <a:ea typeface="맑은 고딕"/>
+                <a:cs typeface="맑은 고딕"/>
               </a:defRPr>
             </a:pPr>
             <a:r>
@@ -8847,7 +9117,9 @@
                 <a:solidFill>
                   <a:srgbClr val="60718A"/>
                 </a:solidFill>
-                <a:latin typeface="Noto Sans CJK KR"/>
+                <a:latin typeface="맑은 고딕"/>
+                <a:ea typeface="맑은 고딕"/>
+                <a:cs typeface="맑은 고딕"/>
               </a:defRPr>
             </a:pPr>
             <a:r>
@@ -8863,7 +9135,9 @@
                 <a:solidFill>
                   <a:srgbClr val="60718A"/>
                 </a:solidFill>
-                <a:latin typeface="Noto Sans CJK KR"/>
+                <a:latin typeface="맑은 고딕"/>
+                <a:ea typeface="맑은 고딕"/>
+                <a:cs typeface="맑은 고딕"/>
               </a:defRPr>
             </a:pPr>
             <a:r>
@@ -8928,7 +9202,9 @@
                 <a:solidFill>
                   <a:srgbClr val="2962FF"/>
                 </a:solidFill>
-                <a:latin typeface="Noto Sans CJK KR"/>
+                <a:latin typeface="맑은 고딕"/>
+                <a:ea typeface="맑은 고딕"/>
+                <a:cs typeface="맑은 고딕"/>
               </a:defRPr>
             </a:pPr>
             <a:r>
@@ -8967,11 +9243,13 @@
                 <a:solidFill>
                   <a:srgbClr val="14233D"/>
                 </a:solidFill>
-                <a:latin typeface="Noto Sans CJK KR"/>
-              </a:defRPr>
-            </a:pPr>
-            <a:r>
-              <a:t>처음 사용해도 작업 순서가 보입니다</a:t>
+                <a:latin typeface="맑은 고딕"/>
+                <a:ea typeface="맑은 고딕"/>
+                <a:cs typeface="맑은 고딕"/>
+              </a:defRPr>
+            </a:pPr>
+            <a:r>
+              <a:t>처음 사용해도 작업 순서가 한눈에 보입니다</a:t>
             </a:r>
           </a:p>
         </p:txBody>
@@ -9006,11 +9284,13 @@
                 <a:solidFill>
                   <a:srgbClr val="60718A"/>
                 </a:solidFill>
-                <a:latin typeface="Noto Sans CJK KR"/>
-              </a:defRPr>
-            </a:pPr>
-            <a:r>
-              <a:t>시작 시 연결과 요청 목록을 준비하고, 필요한 항목을 선택해 처리합니다.</a:t>
+                <a:latin typeface="맑은 고딕"/>
+                <a:ea typeface="맑은 고딕"/>
+                <a:cs typeface="맑은 고딕"/>
+              </a:defRPr>
+            </a:pPr>
+            <a:r>
+              <a:t>시작하면 연결과 요청 목록이 준비되고, 필요한 항목을 선택해 처리합니다.</a:t>
             </a:r>
           </a:p>
         </p:txBody>
@@ -9045,7 +9325,9 @@
                 <a:solidFill>
                   <a:srgbClr val="60718A"/>
                 </a:solidFill>
-                <a:latin typeface="Noto Sans CJK KR"/>
+                <a:latin typeface="맑은 고딕"/>
+                <a:ea typeface="맑은 고딕"/>
+                <a:cs typeface="맑은 고딕"/>
               </a:defRPr>
             </a:pPr>
             <a:r>
@@ -9084,7 +9366,9 @@
                 <a:solidFill>
                   <a:srgbClr val="60718A"/>
                 </a:solidFill>
-                <a:latin typeface="Noto Sans CJK KR"/>
+                <a:latin typeface="맑은 고딕"/>
+                <a:ea typeface="맑은 고딕"/>
+                <a:cs typeface="맑은 고딕"/>
               </a:defRPr>
             </a:pPr>
             <a:r>
@@ -9168,7 +9452,9 @@
                 <a:solidFill>
                   <a:srgbClr val="2962FF"/>
                 </a:solidFill>
-                <a:latin typeface="Noto Sans CJK KR"/>
+                <a:latin typeface="맑은 고딕"/>
+                <a:ea typeface="맑은 고딕"/>
+                <a:cs typeface="맑은 고딕"/>
               </a:defRPr>
             </a:pPr>
             <a:r>
@@ -9207,7 +9493,9 @@
                 <a:solidFill>
                   <a:srgbClr val="14233D"/>
                 </a:solidFill>
-                <a:latin typeface="Noto Sans CJK KR"/>
+                <a:latin typeface="맑은 고딕"/>
+                <a:ea typeface="맑은 고딕"/>
+                <a:cs typeface="맑은 고딕"/>
               </a:defRPr>
             </a:pPr>
             <a:r>
@@ -9246,7 +9534,9 @@
                 <a:solidFill>
                   <a:srgbClr val="60718A"/>
                 </a:solidFill>
-                <a:latin typeface="Noto Sans CJK KR"/>
+                <a:latin typeface="맑은 고딕"/>
+                <a:ea typeface="맑은 고딕"/>
+                <a:cs typeface="맑은 고딕"/>
               </a:defRPr>
             </a:pPr>
             <a:r>
@@ -9330,7 +9620,9 @@
                 <a:solidFill>
                   <a:srgbClr val="2962FF"/>
                 </a:solidFill>
-                <a:latin typeface="Noto Sans CJK KR"/>
+                <a:latin typeface="맑은 고딕"/>
+                <a:ea typeface="맑은 고딕"/>
+                <a:cs typeface="맑은 고딕"/>
               </a:defRPr>
             </a:pPr>
             <a:r>
@@ -9369,7 +9661,9 @@
                 <a:solidFill>
                   <a:srgbClr val="14233D"/>
                 </a:solidFill>
-                <a:latin typeface="Noto Sans CJK KR"/>
+                <a:latin typeface="맑은 고딕"/>
+                <a:ea typeface="맑은 고딕"/>
+                <a:cs typeface="맑은 고딕"/>
               </a:defRPr>
             </a:pPr>
             <a:r>
@@ -9408,7 +9702,9 @@
                 <a:solidFill>
                   <a:srgbClr val="60718A"/>
                 </a:solidFill>
-                <a:latin typeface="Noto Sans CJK KR"/>
+                <a:latin typeface="맑은 고딕"/>
+                <a:ea typeface="맑은 고딕"/>
+                <a:cs typeface="맑은 고딕"/>
               </a:defRPr>
             </a:pPr>
             <a:r>
@@ -9492,7 +9788,9 @@
                 <a:solidFill>
                   <a:srgbClr val="2962FF"/>
                 </a:solidFill>
-                <a:latin typeface="Noto Sans CJK KR"/>
+                <a:latin typeface="맑은 고딕"/>
+                <a:ea typeface="맑은 고딕"/>
+                <a:cs typeface="맑은 고딕"/>
               </a:defRPr>
             </a:pPr>
             <a:r>
@@ -9531,7 +9829,9 @@
                 <a:solidFill>
                   <a:srgbClr val="14233D"/>
                 </a:solidFill>
-                <a:latin typeface="Noto Sans CJK KR"/>
+                <a:latin typeface="맑은 고딕"/>
+                <a:ea typeface="맑은 고딕"/>
+                <a:cs typeface="맑은 고딕"/>
               </a:defRPr>
             </a:pPr>
             <a:r>
@@ -9570,7 +9870,9 @@
                 <a:solidFill>
                   <a:srgbClr val="60718A"/>
                 </a:solidFill>
-                <a:latin typeface="Noto Sans CJK KR"/>
+                <a:latin typeface="맑은 고딕"/>
+                <a:ea typeface="맑은 고딕"/>
+                <a:cs typeface="맑은 고딕"/>
               </a:defRPr>
             </a:pPr>
             <a:r>
@@ -9654,7 +9956,9 @@
                 <a:solidFill>
                   <a:srgbClr val="2962FF"/>
                 </a:solidFill>
-                <a:latin typeface="Noto Sans CJK KR"/>
+                <a:latin typeface="맑은 고딕"/>
+                <a:ea typeface="맑은 고딕"/>
+                <a:cs typeface="맑은 고딕"/>
               </a:defRPr>
             </a:pPr>
             <a:r>
@@ -9693,7 +9997,9 @@
                 <a:solidFill>
                   <a:srgbClr val="14233D"/>
                 </a:solidFill>
-                <a:latin typeface="Noto Sans CJK KR"/>
+                <a:latin typeface="맑은 고딕"/>
+                <a:ea typeface="맑은 고딕"/>
+                <a:cs typeface="맑은 고딕"/>
               </a:defRPr>
             </a:pPr>
             <a:r>
@@ -9732,11 +10038,13 @@
                 <a:solidFill>
                   <a:srgbClr val="60718A"/>
                 </a:solidFill>
-                <a:latin typeface="Noto Sans CJK KR"/>
-              </a:defRPr>
-            </a:pPr>
-            <a:r>
-              <a:t>체크한 항목을 서버 처리</a:t>
+                <a:latin typeface="맑은 고딕"/>
+                <a:ea typeface="맑은 고딕"/>
+                <a:cs typeface="맑은 고딕"/>
+              </a:defRPr>
+            </a:pPr>
+            <a:r>
+              <a:t>체크한 항목을 서버에서 처리</a:t>
             </a:r>
           </a:p>
         </p:txBody>
@@ -9816,7 +10124,9 @@
                 <a:solidFill>
                   <a:srgbClr val="2962FF"/>
                 </a:solidFill>
-                <a:latin typeface="Noto Sans CJK KR"/>
+                <a:latin typeface="맑은 고딕"/>
+                <a:ea typeface="맑은 고딕"/>
+                <a:cs typeface="맑은 고딕"/>
               </a:defRPr>
             </a:pPr>
             <a:r>
@@ -9855,7 +10165,9 @@
                 <a:solidFill>
                   <a:srgbClr val="14233D"/>
                 </a:solidFill>
-                <a:latin typeface="Noto Sans CJK KR"/>
+                <a:latin typeface="맑은 고딕"/>
+                <a:ea typeface="맑은 고딕"/>
+                <a:cs typeface="맑은 고딕"/>
               </a:defRPr>
             </a:pPr>
             <a:r>
@@ -9894,7 +10206,9 @@
                 <a:solidFill>
                   <a:srgbClr val="60718A"/>
                 </a:solidFill>
-                <a:latin typeface="Noto Sans CJK KR"/>
+                <a:latin typeface="맑은 고딕"/>
+                <a:ea typeface="맑은 고딕"/>
+                <a:cs typeface="맑은 고딕"/>
               </a:defRPr>
             </a:pPr>
             <a:r>
@@ -9933,11 +10247,13 @@
                 <a:solidFill>
                   <a:srgbClr val="23324A"/>
                 </a:solidFill>
-                <a:latin typeface="Noto Sans CJK KR"/>
-              </a:defRPr>
-            </a:pPr>
-            <a:r>
-              <a:t>베타 첫 실제 시험은 자동 BUS 완료를 끄고, 대상과 실제 권한을 확인한 후 완료 처리합니다.</a:t>
+                <a:latin typeface="맑은 고딕"/>
+                <a:ea typeface="맑은 고딕"/>
+                <a:cs typeface="맑은 고딕"/>
+              </a:defRPr>
+            </a:pPr>
+            <a:r>
+              <a:t>베타 첫 실제 시험은 자동 BUS 완료를 끄고, 대상과 실제 권한을 확인한 뒤 완료 처리합니다.</a:t>
             </a:r>
           </a:p>
         </p:txBody>
@@ -9998,7 +10314,9 @@
                 <a:solidFill>
                   <a:srgbClr val="2962FF"/>
                 </a:solidFill>
-                <a:latin typeface="Noto Sans CJK KR"/>
+                <a:latin typeface="맑은 고딕"/>
+                <a:ea typeface="맑은 고딕"/>
+                <a:cs typeface="맑은 고딕"/>
               </a:defRPr>
             </a:pPr>
             <a:r>
@@ -10037,7 +10355,9 @@
                 <a:solidFill>
                   <a:srgbClr val="14233D"/>
                 </a:solidFill>
-                <a:latin typeface="Noto Sans CJK KR"/>
+                <a:latin typeface="맑은 고딕"/>
+                <a:ea typeface="맑은 고딕"/>
+                <a:cs typeface="맑은 고딕"/>
               </a:defRPr>
             </a:pPr>
             <a:r>
@@ -10076,7 +10396,9 @@
                 <a:solidFill>
                   <a:srgbClr val="60718A"/>
                 </a:solidFill>
-                <a:latin typeface="Noto Sans CJK KR"/>
+                <a:latin typeface="맑은 고딕"/>
+                <a:ea typeface="맑은 고딕"/>
+                <a:cs typeface="맑은 고딕"/>
               </a:defRPr>
             </a:pPr>
             <a:r>
@@ -10115,7 +10437,9 @@
                 <a:solidFill>
                   <a:srgbClr val="60718A"/>
                 </a:solidFill>
-                <a:latin typeface="Noto Sans CJK KR"/>
+                <a:latin typeface="맑은 고딕"/>
+                <a:ea typeface="맑은 고딕"/>
+                <a:cs typeface="맑은 고딕"/>
               </a:defRPr>
             </a:pPr>
             <a:r>
@@ -10154,7 +10478,9 @@
                 <a:solidFill>
                   <a:srgbClr val="60718A"/>
                 </a:solidFill>
-                <a:latin typeface="Noto Sans CJK KR"/>
+                <a:latin typeface="맑은 고딕"/>
+                <a:ea typeface="맑은 고딕"/>
+                <a:cs typeface="맑은 고딕"/>
               </a:defRPr>
             </a:pPr>
             <a:r>
@@ -10262,7 +10588,9 @@
                 <a:solidFill>
                   <a:srgbClr val="2962FF"/>
                 </a:solidFill>
-                <a:latin typeface="Noto Sans CJK KR"/>
+                <a:latin typeface="맑은 고딕"/>
+                <a:ea typeface="맑은 고딕"/>
+                <a:cs typeface="맑은 고딕"/>
               </a:defRPr>
             </a:pPr>
             <a:r>
@@ -10301,7 +10629,9 @@
                 <a:solidFill>
                   <a:srgbClr val="14233D"/>
                 </a:solidFill>
-                <a:latin typeface="Noto Sans CJK KR"/>
+                <a:latin typeface="맑은 고딕"/>
+                <a:ea typeface="맑은 고딕"/>
+                <a:cs typeface="맑은 고딕"/>
               </a:defRPr>
             </a:pPr>
             <a:r>
@@ -10340,7 +10670,9 @@
                 <a:solidFill>
                   <a:srgbClr val="60718A"/>
                 </a:solidFill>
-                <a:latin typeface="Noto Sans CJK KR"/>
+                <a:latin typeface="맑은 고딕"/>
+                <a:ea typeface="맑은 고딕"/>
+                <a:cs typeface="맑은 고딕"/>
               </a:defRPr>
             </a:pPr>
             <a:r>
@@ -10356,11 +10688,13 @@
                 <a:solidFill>
                   <a:srgbClr val="60718A"/>
                 </a:solidFill>
-                <a:latin typeface="Noto Sans CJK KR"/>
-              </a:defRPr>
-            </a:pPr>
-            <a:r>
-              <a:t>행 선택: 오른쪽에서 대상·진행·오류 확인</a:t>
+                <a:latin typeface="맑은 고딕"/>
+                <a:ea typeface="맑은 고딕"/>
+                <a:cs typeface="맑은 고딕"/>
+              </a:defRPr>
+            </a:pPr>
+            <a:r>
+              <a:t>행을 선택하면 오른쪽에서 대상·진행·오류 확인</a:t>
             </a:r>
           </a:p>
           <a:p>
@@ -10372,7 +10706,9 @@
                 <a:solidFill>
                   <a:srgbClr val="60718A"/>
                 </a:solidFill>
-                <a:latin typeface="Noto Sans CJK KR"/>
+                <a:latin typeface="맑은 고딕"/>
+                <a:ea typeface="맑은 고딕"/>
+                <a:cs typeface="맑은 고딕"/>
               </a:defRPr>
             </a:pPr>
             <a:r>
@@ -10411,7 +10747,9 @@
                 <a:solidFill>
                   <a:srgbClr val="60718A"/>
                 </a:solidFill>
-                <a:latin typeface="Noto Sans CJK KR"/>
+                <a:latin typeface="맑은 고딕"/>
+                <a:ea typeface="맑은 고딕"/>
+                <a:cs typeface="맑은 고딕"/>
               </a:defRPr>
             </a:pPr>
             <a:r>
@@ -10476,7 +10814,9 @@
                 <a:solidFill>
                   <a:srgbClr val="2962FF"/>
                 </a:solidFill>
-                <a:latin typeface="Noto Sans CJK KR"/>
+                <a:latin typeface="맑은 고딕"/>
+                <a:ea typeface="맑은 고딕"/>
+                <a:cs typeface="맑은 고딕"/>
               </a:defRPr>
             </a:pPr>
             <a:r>
@@ -10515,11 +10855,13 @@
                 <a:solidFill>
                   <a:srgbClr val="14233D"/>
                 </a:solidFill>
-                <a:latin typeface="Noto Sans CJK KR"/>
-              </a:defRPr>
-            </a:pPr>
-            <a:r>
-              <a:t>신규 프로젝트: 같은 구조로 쉽게 처리</a:t>
+                <a:latin typeface="맑은 고딕"/>
+                <a:ea typeface="맑은 고딕"/>
+                <a:cs typeface="맑은 고딕"/>
+              </a:defRPr>
+            </a:pPr>
+            <a:r>
+              <a:t>신규 프로젝트: 같은 화면 구성으로 쉽게 처리</a:t>
             </a:r>
           </a:p>
         </p:txBody>
@@ -10554,7 +10896,9 @@
                 <a:solidFill>
                   <a:srgbClr val="60718A"/>
                 </a:solidFill>
-                <a:latin typeface="Noto Sans CJK KR"/>
+                <a:latin typeface="맑은 고딕"/>
+                <a:ea typeface="맑은 고딕"/>
+                <a:cs typeface="맑은 고딕"/>
               </a:defRPr>
             </a:pPr>
             <a:r>
@@ -10593,7 +10937,9 @@
                 <a:solidFill>
                   <a:srgbClr val="60718A"/>
                 </a:solidFill>
-                <a:latin typeface="Noto Sans CJK KR"/>
+                <a:latin typeface="맑은 고딕"/>
+                <a:ea typeface="맑은 고딕"/>
+                <a:cs typeface="맑은 고딕"/>
               </a:defRPr>
             </a:pPr>
             <a:r>
@@ -10632,7 +10978,9 @@
                 <a:solidFill>
                   <a:srgbClr val="60718A"/>
                 </a:solidFill>
-                <a:latin typeface="Noto Sans CJK KR"/>
+                <a:latin typeface="맑은 고딕"/>
+                <a:ea typeface="맑은 고딕"/>
+                <a:cs typeface="맑은 고딕"/>
               </a:defRPr>
             </a:pPr>
             <a:r>
@@ -10740,7 +11088,9 @@
                 <a:solidFill>
                   <a:srgbClr val="2962FF"/>
                 </a:solidFill>
-                <a:latin typeface="Noto Sans CJK KR"/>
+                <a:latin typeface="맑은 고딕"/>
+                <a:ea typeface="맑은 고딕"/>
+                <a:cs typeface="맑은 고딕"/>
               </a:defRPr>
             </a:pPr>
             <a:r>
@@ -10779,7 +11129,9 @@
                 <a:solidFill>
                   <a:srgbClr val="14233D"/>
                 </a:solidFill>
-                <a:latin typeface="Noto Sans CJK KR"/>
+                <a:latin typeface="맑은 고딕"/>
+                <a:ea typeface="맑은 고딕"/>
+                <a:cs typeface="맑은 고딕"/>
               </a:defRPr>
             </a:pPr>
             <a:r>
@@ -10818,7 +11170,9 @@
                 <a:solidFill>
                   <a:srgbClr val="60718A"/>
                 </a:solidFill>
-                <a:latin typeface="Noto Sans CJK KR"/>
+                <a:latin typeface="맑은 고딕"/>
+                <a:ea typeface="맑은 고딕"/>
+                <a:cs typeface="맑은 고딕"/>
               </a:defRPr>
             </a:pPr>
             <a:r>
@@ -10834,7 +11188,9 @@
                 <a:solidFill>
                   <a:srgbClr val="60718A"/>
                 </a:solidFill>
-                <a:latin typeface="Noto Sans CJK KR"/>
+                <a:latin typeface="맑은 고딕"/>
+                <a:ea typeface="맑은 고딕"/>
+                <a:cs typeface="맑은 고딕"/>
               </a:defRPr>
             </a:pPr>
             <a:r>
@@ -10850,7 +11206,9 @@
                 <a:solidFill>
                   <a:srgbClr val="60718A"/>
                 </a:solidFill>
-                <a:latin typeface="Noto Sans CJK KR"/>
+                <a:latin typeface="맑은 고딕"/>
+                <a:ea typeface="맑은 고딕"/>
+                <a:cs typeface="맑은 고딕"/>
               </a:defRPr>
             </a:pPr>
             <a:r>
@@ -10889,7 +11247,9 @@
                 <a:solidFill>
                   <a:srgbClr val="60718A"/>
                 </a:solidFill>
-                <a:latin typeface="Noto Sans CJK KR"/>
+                <a:latin typeface="맑은 고딕"/>
+                <a:ea typeface="맑은 고딕"/>
+                <a:cs typeface="맑은 고딕"/>
               </a:defRPr>
             </a:pPr>
             <a:r>
@@ -10954,7 +11314,9 @@
                 <a:solidFill>
                   <a:srgbClr val="2962FF"/>
                 </a:solidFill>
-                <a:latin typeface="Noto Sans CJK KR"/>
+                <a:latin typeface="맑은 고딕"/>
+                <a:ea typeface="맑은 고딕"/>
+                <a:cs typeface="맑은 고딕"/>
               </a:defRPr>
             </a:pPr>
             <a:r>
@@ -10993,11 +11355,13 @@
                 <a:solidFill>
                   <a:srgbClr val="14233D"/>
                 </a:solidFill>
-                <a:latin typeface="Noto Sans CJK KR"/>
-              </a:defRPr>
-            </a:pPr>
-            <a:r>
-              <a:t>미리보기·Mock·실제 실행은 다릅니다</a:t>
+                <a:latin typeface="맑은 고딕"/>
+                <a:ea typeface="맑은 고딕"/>
+                <a:cs typeface="맑은 고딕"/>
+              </a:defRPr>
+            </a:pPr>
+            <a:r>
+              <a:t>미리보기, Mock, 실제 실행은 서로 다릅니다</a:t>
             </a:r>
           </a:p>
         </p:txBody>
@@ -11032,11 +11396,13 @@
                 <a:solidFill>
                   <a:srgbClr val="60718A"/>
                 </a:solidFill>
-                <a:latin typeface="Noto Sans CJK KR"/>
-              </a:defRPr>
-            </a:pPr>
-            <a:r>
-              <a:t>검증 목적에 맞는 모드를 사용하고, Mock과 실제 실행용 DB를 분리합니다.</a:t>
+                <a:latin typeface="맑은 고딕"/>
+                <a:ea typeface="맑은 고딕"/>
+                <a:cs typeface="맑은 고딕"/>
+              </a:defRPr>
+            </a:pPr>
+            <a:r>
+              <a:t>검증 목적에 맞는 모드를 선택하고, Mock과 실제 실행용 DB는 분리합니다.</a:t>
             </a:r>
           </a:p>
         </p:txBody>
@@ -11071,7 +11437,9 @@
                 <a:solidFill>
                   <a:srgbClr val="60718A"/>
                 </a:solidFill>
-                <a:latin typeface="Noto Sans CJK KR"/>
+                <a:latin typeface="맑은 고딕"/>
+                <a:ea typeface="맑은 고딕"/>
+                <a:cs typeface="맑은 고딕"/>
               </a:defRPr>
             </a:pPr>
             <a:r>
@@ -11110,7 +11478,9 @@
                 <a:solidFill>
                   <a:srgbClr val="60718A"/>
                 </a:solidFill>
-                <a:latin typeface="Noto Sans CJK KR"/>
+                <a:latin typeface="맑은 고딕"/>
+                <a:ea typeface="맑은 고딕"/>
+                <a:cs typeface="맑은 고딕"/>
               </a:defRPr>
             </a:pPr>
             <a:r>
@@ -11194,7 +11564,9 @@
                 <a:solidFill>
                   <a:srgbClr val="2962FF"/>
                 </a:solidFill>
-                <a:latin typeface="Noto Sans CJK KR"/>
+                <a:latin typeface="맑은 고딕"/>
+                <a:ea typeface="맑은 고딕"/>
+                <a:cs typeface="맑은 고딕"/>
               </a:defRPr>
             </a:pPr>
             <a:r>
@@ -11233,7 +11605,9 @@
                 <a:solidFill>
                   <a:srgbClr val="14233D"/>
                 </a:solidFill>
-                <a:latin typeface="Noto Sans CJK KR"/>
+                <a:latin typeface="맑은 고딕"/>
+                <a:ea typeface="맑은 고딕"/>
+                <a:cs typeface="맑은 고딕"/>
               </a:defRPr>
             </a:pPr>
             <a:r>
@@ -11272,7 +11646,9 @@
                 <a:solidFill>
                   <a:srgbClr val="60718A"/>
                 </a:solidFill>
-                <a:latin typeface="Noto Sans CJK KR"/>
+                <a:latin typeface="맑은 고딕"/>
+                <a:ea typeface="맑은 고딕"/>
+                <a:cs typeface="맑은 고딕"/>
               </a:defRPr>
             </a:pPr>
             <a:r>
@@ -11288,7 +11664,9 @@
                 <a:solidFill>
                   <a:srgbClr val="60718A"/>
                 </a:solidFill>
-                <a:latin typeface="Noto Sans CJK KR"/>
+                <a:latin typeface="맑은 고딕"/>
+                <a:ea typeface="맑은 고딕"/>
+                <a:cs typeface="맑은 고딕"/>
               </a:defRPr>
             </a:pPr>
             <a:r>
@@ -11304,7 +11682,9 @@
                 <a:solidFill>
                   <a:srgbClr val="60718A"/>
                 </a:solidFill>
-                <a:latin typeface="Noto Sans CJK KR"/>
+                <a:latin typeface="맑은 고딕"/>
+                <a:ea typeface="맑은 고딕"/>
+                <a:cs typeface="맑은 고딕"/>
               </a:defRPr>
             </a:pPr>
             <a:r>
@@ -11388,7 +11768,9 @@
                 <a:solidFill>
                   <a:srgbClr val="2962FF"/>
                 </a:solidFill>
-                <a:latin typeface="Noto Sans CJK KR"/>
+                <a:latin typeface="맑은 고딕"/>
+                <a:ea typeface="맑은 고딕"/>
+                <a:cs typeface="맑은 고딕"/>
               </a:defRPr>
             </a:pPr>
             <a:r>
@@ -11427,7 +11809,9 @@
                 <a:solidFill>
                   <a:srgbClr val="14233D"/>
                 </a:solidFill>
-                <a:latin typeface="Noto Sans CJK KR"/>
+                <a:latin typeface="맑은 고딕"/>
+                <a:ea typeface="맑은 고딕"/>
+                <a:cs typeface="맑은 고딕"/>
               </a:defRPr>
             </a:pPr>
             <a:r>
@@ -11466,11 +11850,13 @@
                 <a:solidFill>
                   <a:srgbClr val="60718A"/>
                 </a:solidFill>
-                <a:latin typeface="Noto Sans CJK KR"/>
-              </a:defRPr>
-            </a:pPr>
-            <a:r>
-              <a:t>Job·DB·상태 흐름 시험</a:t>
+                <a:latin typeface="맑은 고딕"/>
+                <a:ea typeface="맑은 고딕"/>
+                <a:cs typeface="맑은 고딕"/>
+              </a:defRPr>
+            </a:pPr>
+            <a:r>
+              <a:t>Job·DB·상태 흐름 점검</a:t>
             </a:r>
           </a:p>
           <a:p>
@@ -11482,7 +11868,9 @@
                 <a:solidFill>
                   <a:srgbClr val="60718A"/>
                 </a:solidFill>
-                <a:latin typeface="Noto Sans CJK KR"/>
+                <a:latin typeface="맑은 고딕"/>
+                <a:ea typeface="맑은 고딕"/>
+                <a:cs typeface="맑은 고딕"/>
               </a:defRPr>
             </a:pPr>
             <a:r>
@@ -11498,7 +11886,9 @@
                 <a:solidFill>
                   <a:srgbClr val="60718A"/>
                 </a:solidFill>
-                <a:latin typeface="Noto Sans CJK KR"/>
+                <a:latin typeface="맑은 고딕"/>
+                <a:ea typeface="맑은 고딕"/>
+                <a:cs typeface="맑은 고딕"/>
               </a:defRPr>
             </a:pPr>
             <a:r>
@@ -11582,7 +11972,9 @@
                 <a:solidFill>
                   <a:srgbClr val="2962FF"/>
                 </a:solidFill>
-                <a:latin typeface="Noto Sans CJK KR"/>
+                <a:latin typeface="맑은 고딕"/>
+                <a:ea typeface="맑은 고딕"/>
+                <a:cs typeface="맑은 고딕"/>
               </a:defRPr>
             </a:pPr>
             <a:r>
@@ -11621,7 +12013,9 @@
                 <a:solidFill>
                   <a:srgbClr val="14233D"/>
                 </a:solidFill>
-                <a:latin typeface="Noto Sans CJK KR"/>
+                <a:latin typeface="맑은 고딕"/>
+                <a:ea typeface="맑은 고딕"/>
+                <a:cs typeface="맑은 고딕"/>
               </a:defRPr>
             </a:pPr>
             <a:r>
@@ -11660,7 +12054,9 @@
                 <a:solidFill>
                   <a:srgbClr val="60718A"/>
                 </a:solidFill>
-                <a:latin typeface="Noto Sans CJK KR"/>
+                <a:latin typeface="맑은 고딕"/>
+                <a:ea typeface="맑은 고딕"/>
+                <a:cs typeface="맑은 고딕"/>
               </a:defRPr>
             </a:pPr>
             <a:r>
@@ -11676,7 +12072,9 @@
                 <a:solidFill>
                   <a:srgbClr val="60718A"/>
                 </a:solidFill>
-                <a:latin typeface="Noto Sans CJK KR"/>
+                <a:latin typeface="맑은 고딕"/>
+                <a:ea typeface="맑은 고딕"/>
+                <a:cs typeface="맑은 고딕"/>
               </a:defRPr>
             </a:pPr>
             <a:r>
@@ -11692,7 +12090,9 @@
                 <a:solidFill>
                   <a:srgbClr val="60718A"/>
                 </a:solidFill>
-                <a:latin typeface="Noto Sans CJK KR"/>
+                <a:latin typeface="맑은 고딕"/>
+                <a:ea typeface="맑은 고딕"/>
+                <a:cs typeface="맑은 고딕"/>
               </a:defRPr>
             </a:pPr>
             <a:r>
@@ -11757,7 +12157,9 @@
                 <a:solidFill>
                   <a:srgbClr val="8DB1FF"/>
                 </a:solidFill>
-                <a:latin typeface="Noto Sans CJK KR"/>
+                <a:latin typeface="맑은 고딕"/>
+                <a:ea typeface="맑은 고딕"/>
+                <a:cs typeface="맑은 고딕"/>
               </a:defRPr>
             </a:pPr>
             <a:r>
@@ -11796,7 +12198,9 @@
                 <a:solidFill>
                   <a:srgbClr val="FFFFFF"/>
                 </a:solidFill>
-                <a:latin typeface="Noto Sans CJK KR"/>
+                <a:latin typeface="맑은 고딕"/>
+                <a:ea typeface="맑은 고딕"/>
+                <a:cs typeface="맑은 고딕"/>
               </a:defRPr>
             </a:pPr>
             <a:r>
@@ -11835,7 +12239,9 @@
                 <a:solidFill>
                   <a:srgbClr val="B7C7DF"/>
                 </a:solidFill>
-                <a:latin typeface="Noto Sans CJK KR"/>
+                <a:latin typeface="맑은 고딕"/>
+                <a:ea typeface="맑은 고딕"/>
+                <a:cs typeface="맑은 고딕"/>
               </a:defRPr>
             </a:pPr>
             <a:r>
@@ -11874,7 +12280,9 @@
                 <a:solidFill>
                   <a:srgbClr val="91A6C4"/>
                 </a:solidFill>
-                <a:latin typeface="Noto Sans CJK KR"/>
+                <a:latin typeface="맑은 고딕"/>
+                <a:ea typeface="맑은 고딕"/>
+                <a:cs typeface="맑은 고딕"/>
               </a:defRPr>
             </a:pPr>
             <a:r>
@@ -11913,7 +12321,9 @@
                 <a:solidFill>
                   <a:srgbClr val="91A6C4"/>
                 </a:solidFill>
-                <a:latin typeface="Noto Sans CJK KR"/>
+                <a:latin typeface="맑은 고딕"/>
+                <a:ea typeface="맑은 고딕"/>
+                <a:cs typeface="맑은 고딕"/>
               </a:defRPr>
             </a:pPr>
             <a:r>
@@ -11997,7 +12407,9 @@
                 <a:solidFill>
                   <a:srgbClr val="78DFBE"/>
                 </a:solidFill>
-                <a:latin typeface="Noto Sans CJK KR"/>
+                <a:latin typeface="맑은 고딕"/>
+                <a:ea typeface="맑은 고딕"/>
+                <a:cs typeface="맑은 고딕"/>
               </a:defRPr>
             </a:pPr>
             <a:r>
@@ -12036,7 +12448,9 @@
                 <a:solidFill>
                   <a:srgbClr val="FFFFFF"/>
                 </a:solidFill>
-                <a:latin typeface="Noto Sans CJK KR"/>
+                <a:latin typeface="맑은 고딕"/>
+                <a:ea typeface="맑은 고딕"/>
+                <a:cs typeface="맑은 고딕"/>
               </a:defRPr>
             </a:pPr>
             <a:r>
@@ -12052,7 +12466,9 @@
                 <a:solidFill>
                   <a:srgbClr val="FFFFFF"/>
                 </a:solidFill>
-                <a:latin typeface="Noto Sans CJK KR"/>
+                <a:latin typeface="맑은 고딕"/>
+                <a:ea typeface="맑은 고딕"/>
+                <a:cs typeface="맑은 고딕"/>
               </a:defRPr>
             </a:pPr>
             <a:r>
@@ -12136,7 +12552,9 @@
                 <a:solidFill>
                   <a:srgbClr val="FFC76C"/>
                 </a:solidFill>
-                <a:latin typeface="Noto Sans CJK KR"/>
+                <a:latin typeface="맑은 고딕"/>
+                <a:ea typeface="맑은 고딕"/>
+                <a:cs typeface="맑은 고딕"/>
               </a:defRPr>
             </a:pPr>
             <a:r>
@@ -12175,11 +12593,13 @@
                 <a:solidFill>
                   <a:srgbClr val="FFFFFF"/>
                 </a:solidFill>
-                <a:latin typeface="Noto Sans CJK KR"/>
-              </a:defRPr>
-            </a:pPr>
-            <a:r>
-              <a:t>오류와 실제 권한 확인 후</a:t>
+                <a:latin typeface="맑은 고딕"/>
+                <a:ea typeface="맑은 고딕"/>
+                <a:cs typeface="맑은 고딕"/>
+              </a:defRPr>
+            </a:pPr>
+            <a:r>
+              <a:t>오류와 실제 권한을 확인한 뒤</a:t>
             </a:r>
           </a:p>
           <a:p>
@@ -12191,7 +12611,9 @@
                 <a:solidFill>
                   <a:srgbClr val="FFFFFF"/>
                 </a:solidFill>
-                <a:latin typeface="Noto Sans CJK KR"/>
+                <a:latin typeface="맑은 고딕"/>
+                <a:ea typeface="맑은 고딕"/>
+                <a:cs typeface="맑은 고딕"/>
               </a:defRPr>
             </a:pPr>
             <a:r>
@@ -12275,7 +12697,9 @@
                 <a:solidFill>
                   <a:srgbClr val="9AB8FF"/>
                 </a:solidFill>
-                <a:latin typeface="Noto Sans CJK KR"/>
+                <a:latin typeface="맑은 고딕"/>
+                <a:ea typeface="맑은 고딕"/>
+                <a:cs typeface="맑은 고딕"/>
               </a:defRPr>
             </a:pPr>
             <a:r>
@@ -12314,7 +12738,9 @@
                 <a:solidFill>
                   <a:srgbClr val="FFFFFF"/>
                 </a:solidFill>
-                <a:latin typeface="Noto Sans CJK KR"/>
+                <a:latin typeface="맑은 고딕"/>
+                <a:ea typeface="맑은 고딕"/>
+                <a:cs typeface="맑은 고딕"/>
               </a:defRPr>
             </a:pPr>
             <a:r>
@@ -12330,7 +12756,9 @@
                 <a:solidFill>
                   <a:srgbClr val="FFFFFF"/>
                 </a:solidFill>
-                <a:latin typeface="Noto Sans CJK KR"/>
+                <a:latin typeface="맑은 고딕"/>
+                <a:ea typeface="맑은 고딕"/>
+                <a:cs typeface="맑은 고딕"/>
               </a:defRPr>
             </a:pPr>
             <a:r>
@@ -12369,7 +12797,9 @@
                 <a:solidFill>
                   <a:srgbClr val="D1DDEF"/>
                 </a:solidFill>
-                <a:latin typeface="Noto Sans CJK KR"/>
+                <a:latin typeface="맑은 고딕"/>
+                <a:ea typeface="맑은 고딕"/>
+                <a:cs typeface="맑은 고딕"/>
               </a:defRPr>
             </a:pPr>
             <a:r>
@@ -12429,9 +12859,9 @@
     </a:clrScheme>
     <a:fontScheme name="Office">
       <a:majorFont>
-        <a:latin typeface="Calibri"/>
-        <a:ea typeface=""/>
-        <a:cs typeface=""/>
+        <a:latin typeface="맑은 고딕"/>
+        <a:ea typeface="맑은 고딕"/>
+        <a:cs typeface="맑은 고딕"/>
         <a:font script="Jpan" typeface="ＭＳ Ｐゴシック"/>
         <a:font script="Hang" typeface="맑은 고딕"/>
         <a:font script="Hans" typeface="宋体"/>
@@ -12464,9 +12894,9 @@
         <a:font script="Geor" typeface="Sylfaen"/>
       </a:majorFont>
       <a:minorFont>
-        <a:latin typeface="Calibri"/>
-        <a:ea typeface=""/>
-        <a:cs typeface=""/>
+        <a:latin typeface="맑은 고딕"/>
+        <a:ea typeface="맑은 고딕"/>
+        <a:cs typeface="맑은 고딕"/>
         <a:font script="Jpan" typeface="ＭＳ Ｐゴシック"/>
         <a:font script="Hang" typeface="맑은 고딕"/>
         <a:font script="Hans" typeface="宋体"/>
